--- a/10-Knowledge-Products/KP1-GEA/videos/module_1/en/decks/KP1_M1_1.3_Deck_v0.2.pptx
+++ b/10-Knowledge-Products/KP1-GEA/videos/module_1/en/decks/KP1_M1_1.3_Deck_v0.2.pptx
@@ -14,14 +14,14 @@
     <p:handoutMasterId r:id="rId47"/>
   </p:handoutMasterIdLst>
   <p:sldIdLst>
-    <p:sldId id="2681" r:id="rId8"/>
-    <p:sldId id="2708" r:id="rId30"/>
-    <p:sldId id="2709" r:id="rId31"/>
     <p:sldId id="2710" r:id="rId32"/>
     <p:sldId id="2711" r:id="rId33"/>
     <p:sldId id="2712" r:id="rId34"/>
     <p:sldId id="2713" r:id="rId35"/>
     <p:sldId id="2714" r:id="rId36"/>
+    <p:sldId id="2715" r:id="rId37"/>
+    <p:sldId id="2716" r:id="rId38"/>
+    <p:sldId id="2717" r:id="rId39"/>
   </p:sldIdLst>
   <p:sldSz cx="12192000" cy="6858000"/>
   <p:notesSz cx="6858000" cy="9144000"/>
@@ -888,7 +888,7 @@
 </p:notesMaster>
 </file>
 
-<file path=ppt/notesSlides/notesSlide15.xml><?xml version="1.0" encoding="utf-8"?>
+<file path=ppt/notesSlides/notesSlide1.xml><?xml version="1.0" encoding="utf-8"?>
 <p:notes xmlns:a="http://schemas.openxmlformats.org/drawingml/2006/main" xmlns:p="http://schemas.openxmlformats.org/presentationml/2006/main" xmlns:r="http://schemas.openxmlformats.org/officeDocument/2006/relationships">
   <p:cSld>
     <p:spTree>
@@ -933,83 +933,7 @@
           <a:lstStyle/>
           <a:p>
             <a:r>
-              <a:t>VO, slide 1: You may be thinking: my country already requires this. Every new digital project must specify open APIs; every contract must require interoperability. So why does the citizen still fill the same form five times? Procurement rules can require behaviour. They cannot make it the cheapest choice.</a:t>
-            </a:r>
-          </a:p>
-        </p:txBody>
-      </p:sp>
-      <p:sp>
-        <p:nvSpPr>
-          <p:cNvPr id="4" name="Slide Number Placeholder 3"/>
-          <p:cNvSpPr>
-            <a:spLocks noGrp="1"/>
-          </p:cNvSpPr>
-          <p:nvPr>
-            <p:ph type="sldNum" idx="5" sz="quarter"/>
-          </p:nvPr>
-        </p:nvSpPr>
-        <p:spPr/>
-      </p:sp>
-    </p:spTree>
-  </p:cSld>
-  <p:clrMapOvr>
-    <a:masterClrMapping/>
-  </p:clrMapOvr>
-</p:notes>
-</file>
-
-<file path=ppt/notesSlides/notesSlide16.xml><?xml version="1.0" encoding="utf-8"?>
-<p:notes xmlns:a="http://schemas.openxmlformats.org/drawingml/2006/main" xmlns:p="http://schemas.openxmlformats.org/presentationml/2006/main" xmlns:r="http://schemas.openxmlformats.org/officeDocument/2006/relationships">
-  <p:cSld>
-    <p:spTree>
-      <p:nvGrpSpPr>
-        <p:cNvPr id="1" name=""/>
-        <p:cNvGrpSpPr/>
-        <p:nvPr/>
-      </p:nvGrpSpPr>
-      <p:grpSpPr>
-        <a:xfrm>
-          <a:off x="0" y="0"/>
-          <a:ext cx="0" cy="0"/>
-          <a:chOff x="0" y="0"/>
-          <a:chExt cx="0" cy="0"/>
-        </a:xfrm>
-      </p:grpSpPr>
-      <p:sp>
-        <p:nvSpPr>
-          <p:cNvPr id="2" name="Slide Image Placeholder 1"/>
-          <p:cNvSpPr>
-            <a:spLocks noGrp="1"/>
-          </p:cNvSpPr>
-          <p:nvPr>
-            <p:ph type="sldImg" idx="2"/>
-          </p:nvPr>
-        </p:nvSpPr>
-        <p:spPr/>
-      </p:sp>
-      <p:sp>
-        <p:nvSpPr>
-          <p:cNvPr id="3" name="Notes Placeholder 2"/>
-          <p:cNvSpPr>
-            <a:spLocks noGrp="1"/>
-          </p:cNvSpPr>
-          <p:nvPr>
-            <p:ph type="body" idx="3" sz="quarter"/>
-          </p:nvPr>
-        </p:nvSpPr>
-        <p:spPr/>
-        <p:txBody>
-          <a:bodyPr/>
-          <a:lstStyle/>
-          <a:p>
-            <a:r>
-              <a:t>VO: Inside any new programme, the team is rational. They have a contract, a budget, a deadline. Re-using another ministry's identity system means learning that system, negotiating with that ministry's team, accepting their delays. Building your own version is faster. So the team builds their own. That is not a failure of discipline. That is the project doing exactly what it was funded to do.</a:t>
-            </a:r>
-          </a:p>
-          <a:p/>
-          <a:p>
-            <a:r>
-              <a:t>Tone: the math, not the morality — no blame on project teams.</a:t>
+              <a:t>VO: Reference architectures answer the questions projects do not. Other countries have built these systems for decades. They learned what survives technology change and what does not. They learned which architectural decisions still hold up after twenty years and which decisions cost them dearly. A reference architecture is that learning, written down. PAERA is one such reference. Adopting it means starting with their lessons, instead of paying for the same lessons yourself over the next twenty years.</a:t>
             </a:r>
           </a:p>
         </p:txBody>
@@ -1079,13 +1003,7 @@
           <a:lstStyle/>
           <a:p>
             <a:r>
-              <a:t>VO: Re-use becomes rational only when you can see across the whole government. From that view, the math changes. The first ministry pays to build the identity system. The second ministry does not — it consumes the first one. The third does not. The fourth does not. Over five years, the country saves a meaningful share of its sectoral digital spend.</a:t>
-            </a:r>
-          </a:p>
-          <a:p/>
-          <a:p>
-            <a:r>
-              <a:t>VO: But this view does not exist inside any single project. It exists only at the level of your country's whole digital portfolio. That is the view an EA gives you, and it is the view your minister needs to make funding decisions that look different from project-level cost choices.</a:t>
+              <a:t>Title card — the cold open. The hosts name the module, the video number, the title and the single message on this slide; no scripted narration. Hold until the opener begins; the opener is narrated on the next slide.</a:t>
             </a:r>
           </a:p>
         </p:txBody>
@@ -1155,13 +1073,7 @@
           <a:lstStyle/>
           <a:p>
             <a:r>
-              <a:t>VO: There are two more things projects do not deliver. The first is sustainability. A project ships on time and moves on. Twelve years later, the original vendor is gone. The open-source library has forked. The technology has moved on. The system you are still running has nobody who fully understands it. Projects are not incentivised to plan for that moment — they are incentivised to ship.</a:t>
-            </a:r>
-          </a:p>
-          <a:p/>
-          <a:p>
-            <a:r>
-              <a:t>VO: The second is complexity reduction. A project says yes to most feature requests, because feature requests come from people the project must please. Five years later, your system is too complex to maintain or to change. Each yes has accumulated. Saying no requires authority the project does not have.</a:t>
+              <a:t>VO: You may be thinking: my country already requires this. Every new digital project must specify open APIs; every contract must require interoperability. So why does the citizen still fill the same form five times? Procurement rules can require behaviour. They cannot make it the cheapest choice.</a:t>
             </a:r>
           </a:p>
         </p:txBody>
@@ -1231,7 +1143,13 @@
           <a:lstStyle/>
           <a:p>
             <a:r>
-              <a:t>VO: Reference architectures answer the questions projects do not. Other countries have built these systems for decades. They learned what survives technology change and what does not. They learned which architectural decisions still hold up after twenty years and which decisions cost them dearly. A reference architecture is that learning, written down. PAERA is one such reference. Adopting it means starting with their lessons, instead of paying for the same lessons yourself over the next twenty years.</a:t>
+              <a:t>VO: Inside any new programme, the team is rational. They have a contract, a budget, a deadline. Re-using another ministry's identity system means learning that system, negotiating with that ministry's team, accepting their delays. Building your own version is faster. So the team builds their own. That is not a failure of discipline. That is the project doing exactly what it was funded to do.</a:t>
+            </a:r>
+          </a:p>
+          <a:p/>
+          <a:p>
+            <a:r>
+              <a:t>Tone: the math, not the morality — no blame on project teams.</a:t>
             </a:r>
           </a:p>
         </p:txBody>
@@ -1301,7 +1219,13 @@
           <a:lstStyle/>
           <a:p>
             <a:r>
-              <a:t>Sources slide, held ~5 seconds at the end of the video. Links are compiled into the YouTube description per ITU convention; no URLs read aloud.</a:t>
+              <a:t>VO: There are two more things projects do not deliver. The first is sustainability. A project ships on time and moves on. Twelve years later, the original vendor is gone. The open-source library has forked. The technology has moved on. The system you are still running has nobody who fully understands it. Projects are not incentivised to plan for that moment — they are incentivised to ship.</a:t>
+            </a:r>
+          </a:p>
+          <a:p/>
+          <a:p>
+            <a:r>
+              <a:t>VO: The second is complexity reduction. A project says yes to most feature requests, because feature requests come from people the project must please. Five years later, your system is too complex to maintain or to change. Each yes has accumulated. Saying no requires authority the project does not have.</a:t>
             </a:r>
           </a:p>
         </p:txBody>
@@ -1371,13 +1295,13 @@
           <a:lstStyle/>
           <a:p>
             <a:r>
-              <a:t>PRACTICE BOX (on-screen only — never read it, never paraphrase it, never point at it). It replaces the narrated handoff: this video ends on the recap and the Sources slide.</a:t>
+              <a:t>VO: Re-use becomes rational only when you can see across the whole government. From that view, the math changes. The first ministry pays to build the identity system. The second ministry does not — it consumes the first one. The third does not. The fourth does not. Over five years, the country saves a meaningful share of its sectoral digital spend.</a:t>
             </a:r>
           </a:p>
           <a:p/>
           <a:p>
             <a:r>
-              <a:t>VO: So when you make the case for an EA, the case is this. The four-part picture is the artefact. Planning is the function. Re-use, sustainability and complexity reduction — three things every digital ministry says it wants — none of these come from projects alone. All of them come from the planning view that an EA gives, and from the reference architectures that EA practice connects you to. That is why projects cannot fix this themselves. That is why an EA is work your minister must commission, separately, deliberately, with sustained funding.</a:t>
+              <a:t>VO: But this view does not exist inside any single project. It exists only at the level of your country's whole digital portfolio. That is the view an EA gives you, and it is the view your minister needs to make funding decisions that look different from project-level cost choices.</a:t>
             </a:r>
           </a:p>
         </p:txBody>
@@ -1402,7 +1326,7 @@
 </p:notes>
 </file>
 
-<file path=ppt/notesSlides/notesSlide21.xml><?xml version="1.0" encoding="utf-8"?>
+<file path=ppt/notesSlides/notesSlide23.xml><?xml version="1.0" encoding="utf-8"?>
 <p:notes xmlns:a="http://schemas.openxmlformats.org/drawingml/2006/main" xmlns:p="http://schemas.openxmlformats.org/presentationml/2006/main" xmlns:r="http://schemas.openxmlformats.org/officeDocument/2006/relationships">
   <p:cSld>
     <p:spTree>
@@ -1447,7 +1371,83 @@
           <a:lstStyle/>
           <a:p>
             <a:r>
-              <a:t>Title card for standalone video 1.3. Content slides are identical to the corresponding section of the combined deck KP1_M1_Deck_v0.2.pptx; voice-over is in each slide’s notes.</a:t>
+              <a:t>PRACTICE BOX (on-screen only — never read it, never paraphrase it, never point at it). It replaces the narrated handoff: this video ends on the recap and the Sources slide.</a:t>
+            </a:r>
+          </a:p>
+          <a:p/>
+          <a:p>
+            <a:r>
+              <a:t>VO: So when you make the case for an EA, the case is this. The four-part picture is the artefact. Planning is the function. Re-use, sustainability and complexity reduction — three things every digital ministry says it wants — none of these come from projects alone. All of them come from the planning view that an EA gives, and from the reference architectures that EA practice connects you to. That is why projects cannot fix this themselves. That is why an EA is work your minister must commission, separately, deliberately, with sustained funding.</a:t>
+            </a:r>
+          </a:p>
+        </p:txBody>
+      </p:sp>
+      <p:sp>
+        <p:nvSpPr>
+          <p:cNvPr id="4" name="Slide Number Placeholder 3"/>
+          <p:cNvSpPr>
+            <a:spLocks noGrp="1"/>
+          </p:cNvSpPr>
+          <p:nvPr>
+            <p:ph type="sldNum" idx="5" sz="quarter"/>
+          </p:nvPr>
+        </p:nvSpPr>
+        <p:spPr/>
+      </p:sp>
+    </p:spTree>
+  </p:cSld>
+  <p:clrMapOvr>
+    <a:masterClrMapping/>
+  </p:clrMapOvr>
+</p:notes>
+</file>
+
+<file path=ppt/notesSlides/notesSlide24.xml><?xml version="1.0" encoding="utf-8"?>
+<p:notes xmlns:a="http://schemas.openxmlformats.org/drawingml/2006/main" xmlns:p="http://schemas.openxmlformats.org/presentationml/2006/main" xmlns:r="http://schemas.openxmlformats.org/officeDocument/2006/relationships">
+  <p:cSld>
+    <p:spTree>
+      <p:nvGrpSpPr>
+        <p:cNvPr id="1" name=""/>
+        <p:cNvGrpSpPr/>
+        <p:nvPr/>
+      </p:nvGrpSpPr>
+      <p:grpSpPr>
+        <a:xfrm>
+          <a:off x="0" y="0"/>
+          <a:ext cx="0" cy="0"/>
+          <a:chOff x="0" y="0"/>
+          <a:chExt cx="0" cy="0"/>
+        </a:xfrm>
+      </p:grpSpPr>
+      <p:sp>
+        <p:nvSpPr>
+          <p:cNvPr id="2" name="Slide Image Placeholder 1"/>
+          <p:cNvSpPr>
+            <a:spLocks noGrp="1"/>
+          </p:cNvSpPr>
+          <p:nvPr>
+            <p:ph type="sldImg" idx="2"/>
+          </p:nvPr>
+        </p:nvSpPr>
+        <p:spPr/>
+      </p:sp>
+      <p:sp>
+        <p:nvSpPr>
+          <p:cNvPr id="3" name="Notes Placeholder 2"/>
+          <p:cNvSpPr>
+            <a:spLocks noGrp="1"/>
+          </p:cNvSpPr>
+          <p:nvPr>
+            <p:ph type="body" idx="3" sz="quarter"/>
+          </p:nvPr>
+        </p:nvSpPr>
+        <p:spPr/>
+        <p:txBody>
+          <a:bodyPr/>
+          <a:lstStyle/>
+          <a:p>
+            <a:r>
+              <a:t>Sources slide, held ~5 seconds at the end of the video. Links are compiled into the YouTube description per ITU convention; no URLs read aloud.</a:t>
             </a:r>
           </a:p>
         </p:txBody>
@@ -11608,1465 +11608,6 @@
 </p:sldMaster>
 </file>
 
-<file path=ppt/slides/slide1.xml><?xml version="1.0" encoding="utf-8"?>
-<p:sld xmlns:a="http://schemas.openxmlformats.org/drawingml/2006/main" xmlns:r="http://schemas.openxmlformats.org/officeDocument/2006/relationships" xmlns:p="http://schemas.openxmlformats.org/presentationml/2006/main">
-  <p:cSld>
-    <p:spTree>
-      <p:nvGrpSpPr>
-        <p:cNvPr id="1" name=""/>
-        <p:cNvGrpSpPr/>
-        <p:nvPr/>
-      </p:nvGrpSpPr>
-      <p:grpSpPr>
-        <a:xfrm>
-          <a:off x="0" y="0"/>
-          <a:ext cx="0" cy="0"/>
-          <a:chOff x="0" y="0"/>
-          <a:chExt cx="0" cy="0"/>
-        </a:xfrm>
-      </p:grpSpPr>
-      <p:cxnSp>
-        <p:nvCxnSpPr>
-          <p:cNvPr id="11" name="Straight Connector 10">
-            <a:extLst>
-              <a:ext uri="{FF2B5EF4-FFF2-40B4-BE49-F238E27FC236}">
-                <a16:creationId xmlns:a16="http://schemas.microsoft.com/office/drawing/2014/main" id="{D9AD66F2-F7C0-4D03-9150-D28F17AC561D}"/>
-              </a:ext>
-            </a:extLst>
-          </p:cNvPr>
-          <p:cNvCxnSpPr>
-            <a:cxnSpLocks/>
-          </p:cNvCxnSpPr>
-          <p:nvPr/>
-        </p:nvCxnSpPr>
-        <p:spPr>
-          <a:xfrm>
-            <a:off x="373021" y="2198718"/>
-            <a:ext cx="6843567" cy="0"/>
-          </a:xfrm>
-          <a:prstGeom prst="line">
-            <a:avLst/>
-          </a:prstGeom>
-          <a:ln w="12700">
-            <a:solidFill>
-              <a:srgbClr val="009CD6"/>
-            </a:solidFill>
-          </a:ln>
-        </p:spPr>
-        <p:style>
-          <a:lnRef idx="1">
-            <a:schemeClr val="accent1"/>
-          </a:lnRef>
-          <a:fillRef idx="0">
-            <a:schemeClr val="accent1"/>
-          </a:fillRef>
-          <a:effectRef idx="0">
-            <a:schemeClr val="accent1"/>
-          </a:effectRef>
-          <a:fontRef idx="minor">
-            <a:schemeClr val="tx1"/>
-          </a:fontRef>
-        </p:style>
-      </p:cxnSp>
-      <p:sp>
-        <p:nvSpPr>
-          <p:cNvPr id="12" name="Title 9">
-            <a:extLst>
-              <a:ext uri="{FF2B5EF4-FFF2-40B4-BE49-F238E27FC236}">
-                <a16:creationId xmlns:a16="http://schemas.microsoft.com/office/drawing/2014/main" id="{EEB08032-CE0E-4986-AEDF-A41026C0E8B9}"/>
-              </a:ext>
-            </a:extLst>
-          </p:cNvPr>
-          <p:cNvSpPr txBox="1">
-            <a:spLocks/>
-          </p:cNvSpPr>
-          <p:nvPr/>
-        </p:nvSpPr>
-        <p:spPr>
-          <a:xfrm>
-            <a:off x="237734" y="702833"/>
-            <a:ext cx="6432007" cy="1218817"/>
-          </a:xfrm>
-          <a:prstGeom prst="rect">
-            <a:avLst/>
-          </a:prstGeom>
-        </p:spPr>
-        <p:txBody>
-          <a:bodyPr anchor="b" wrap="square">
-            <a:noAutofit/>
-          </a:bodyPr>
-          <a:lstStyle>
-            <a:lvl1pPr algn="l" defTabSz="914400" rtl="0" eaLnBrk="1" latinLnBrk="0" hangingPunct="1">
-              <a:lnSpc>
-                <a:spcPct val="90000"/>
-              </a:lnSpc>
-              <a:spcBef>
-                <a:spcPct val="0"/>
-              </a:spcBef>
-              <a:buNone/>
-              <a:defRPr sz="4000" kern="1200">
-                <a:solidFill>
-                  <a:schemeClr val="bg1"/>
-                </a:solidFill>
-                <a:latin typeface="Arial" panose="020B0604020202020204" pitchFamily="34" charset="0"/>
-                <a:ea typeface="+mj-ea"/>
-                <a:cs typeface="Arial" panose="020B0604020202020204" pitchFamily="34" charset="0"/>
-              </a:defRPr>
-            </a:lvl1pPr>
-          </a:lstStyle>
-          <a:p>
-            <a:r>
-              <a:rPr sz="2800" b="1" i="0">
-                <a:solidFill>
-                  <a:srgbClr val="1A1A1A"/>
-                </a:solidFill>
-                <a:latin typeface="Arial"/>
-              </a:rPr>
-              <a:t>1.3 — Why projects can't do this themselves</a:t>
-            </a:r>
-          </a:p>
-        </p:txBody>
-      </p:sp>
-      <p:pic>
-        <p:nvPicPr>
-          <p:cNvPr id="7" name="Picture 6">
-            <a:extLst>
-              <a:ext uri="{FF2B5EF4-FFF2-40B4-BE49-F238E27FC236}">
-                <a16:creationId xmlns:a16="http://schemas.microsoft.com/office/drawing/2014/main" id="{A2066351-C569-4C4C-A096-308777FCDC32}"/>
-              </a:ext>
-            </a:extLst>
-          </p:cNvPr>
-          <p:cNvPicPr>
-            <a:picLocks noChangeAspect="1"/>
-          </p:cNvPicPr>
-          <p:nvPr/>
-        </p:nvPicPr>
-        <p:blipFill>
-          <a:blip r:embed="rId2">
-            <a:extLst>
-              <a:ext uri="{28A0092B-C50C-407E-A947-70E740481C1C}">
-                <a14:useLocalDpi xmlns:a14="http://schemas.microsoft.com/office/drawing/2010/main" val="0"/>
-              </a:ext>
-            </a:extLst>
-          </a:blip>
-          <a:srcRect t="20219" b="14729"/>
-          <a:stretch>
-            <a:fillRect/>
-          </a:stretch>
-        </p:blipFill>
-        <p:spPr>
-          <a:xfrm>
-            <a:off x="0" y="5620871"/>
-            <a:ext cx="1323975" cy="1218816"/>
-          </a:xfrm>
-          <a:prstGeom prst="rect">
-            <a:avLst/>
-          </a:prstGeom>
-        </p:spPr>
-      </p:pic>
-      <p:sp>
-        <p:nvSpPr>
-          <p:cNvPr id="14" name="Title 9">
-            <a:extLst>
-              <a:ext uri="{FF2B5EF4-FFF2-40B4-BE49-F238E27FC236}">
-                <a16:creationId xmlns:a16="http://schemas.microsoft.com/office/drawing/2014/main" id="{B5087B80-3EE4-1881-0130-ED58CA625092}"/>
-              </a:ext>
-            </a:extLst>
-          </p:cNvPr>
-          <p:cNvSpPr txBox="1">
-            <a:spLocks/>
-          </p:cNvSpPr>
-          <p:nvPr/>
-        </p:nvSpPr>
-        <p:spPr>
-          <a:xfrm>
-            <a:off x="284452" y="2475786"/>
-            <a:ext cx="6382893" cy="953213"/>
-          </a:xfrm>
-          <a:prstGeom prst="rect">
-            <a:avLst/>
-          </a:prstGeom>
-        </p:spPr>
-        <p:txBody>
-          <a:bodyPr anchor="t" wrap="square">
-            <a:noAutofit/>
-          </a:bodyPr>
-          <a:lstStyle>
-            <a:lvl1pPr algn="l" defTabSz="914400" rtl="0" eaLnBrk="1" latinLnBrk="0" hangingPunct="1">
-              <a:lnSpc>
-                <a:spcPct val="90000"/>
-              </a:lnSpc>
-              <a:spcBef>
-                <a:spcPct val="0"/>
-              </a:spcBef>
-              <a:buNone/>
-              <a:defRPr sz="4000" kern="1200">
-                <a:solidFill>
-                  <a:schemeClr val="bg1"/>
-                </a:solidFill>
-                <a:latin typeface="Arial" panose="020B0604020202020204" pitchFamily="34" charset="0"/>
-                <a:ea typeface="+mj-ea"/>
-                <a:cs typeface="Arial" panose="020B0604020202020204" pitchFamily="34" charset="0"/>
-              </a:defRPr>
-            </a:lvl1pPr>
-          </a:lstStyle>
-          <a:p>
-            <a:pPr marL="0" marR="0" lvl="0" indent="0" rtl="0">
-              <a:spcBef>
-                <a:spcPts val="600"/>
-              </a:spcBef>
-              <a:spcAft>
-                <a:spcPts val="600"/>
-              </a:spcAft>
-              <a:buNone/>
-            </a:pPr>
-            <a:r>
-              <a:rPr sz="1300" b="1" i="0">
-                <a:solidFill>
-                  <a:srgbClr val="006E96"/>
-                </a:solidFill>
-                <a:latin typeface="Arial"/>
-              </a:rPr>
-              <a:t>KP1 · Government Enterprise Architecture · Module 1 · Video 1.3</a:t>
-            </a:r>
-          </a:p>
-          <a:p>
-            <a:r>
-              <a:rPr sz="1200" b="0" i="1">
-                <a:solidFill>
-                  <a:srgbClr val="595959"/>
-                </a:solidFill>
-                <a:latin typeface="Arial"/>
-              </a:rPr>
-              <a:t>Procurement rules can require interoperability. They cannot deliver it. Only planning at the level of the whole government, supported by reference architectures, can.</a:t>
-            </a:r>
-          </a:p>
-        </p:txBody>
-      </p:sp>
-      <p:sp>
-        <p:nvSpPr>
-          <p:cNvPr id="17" name="Title 9">
-            <a:extLst>
-              <a:ext uri="{FF2B5EF4-FFF2-40B4-BE49-F238E27FC236}">
-                <a16:creationId xmlns:a16="http://schemas.microsoft.com/office/drawing/2014/main" id="{5E8796F7-DD26-D250-5E97-B38B22298E72}"/>
-              </a:ext>
-            </a:extLst>
-          </p:cNvPr>
-          <p:cNvSpPr txBox="1">
-            <a:spLocks/>
-          </p:cNvSpPr>
-          <p:nvPr/>
-        </p:nvSpPr>
-        <p:spPr>
-          <a:xfrm>
-            <a:off x="284452" y="4363897"/>
-            <a:ext cx="6382893" cy="953213"/>
-          </a:xfrm>
-          <a:prstGeom prst="rect">
-            <a:avLst/>
-          </a:prstGeom>
-        </p:spPr>
-        <p:txBody>
-          <a:bodyPr anchor="t" wrap="square">
-            <a:noAutofit/>
-          </a:bodyPr>
-          <a:lstStyle>
-            <a:lvl1pPr algn="l" defTabSz="914400" rtl="0" eaLnBrk="1" latinLnBrk="0" hangingPunct="1">
-              <a:lnSpc>
-                <a:spcPct val="90000"/>
-              </a:lnSpc>
-              <a:spcBef>
-                <a:spcPct val="0"/>
-              </a:spcBef>
-              <a:buNone/>
-              <a:defRPr sz="4000" kern="1200">
-                <a:solidFill>
-                  <a:schemeClr val="bg1"/>
-                </a:solidFill>
-                <a:latin typeface="Arial" panose="020B0604020202020204" pitchFamily="34" charset="0"/>
-                <a:ea typeface="+mj-ea"/>
-                <a:cs typeface="Arial" panose="020B0604020202020204" pitchFamily="34" charset="0"/>
-              </a:defRPr>
-            </a:lvl1pPr>
-          </a:lstStyle>
-          <a:p>
-            <a:pPr marL="0" marR="0" lvl="0" indent="0" rtl="0">
-              <a:spcBef>
-                <a:spcPts val="600"/>
-              </a:spcBef>
-              <a:spcAft>
-                <a:spcPts val="400"/>
-              </a:spcAft>
-              <a:buNone/>
-            </a:pPr>
-            <a:r>
-              <a:rPr sz="1400" b="1" i="0">
-                <a:solidFill>
-                  <a:srgbClr val="1A1A1A"/>
-                </a:solidFill>
-                <a:latin typeface="Arial"/>
-              </a:rPr>
-              <a:t>Target audience: </a:t>
-            </a:r>
-            <a:r>
-              <a:rPr sz="1400" b="0" i="0">
-                <a:solidFill>
-                  <a:srgbClr val="1A1A1A"/>
-                </a:solidFill>
-                <a:latin typeface="Arial"/>
-              </a:rPr>
-              <a:t>CDO · Director-General · sector minister</a:t>
-            </a:r>
-          </a:p>
-        </p:txBody>
-      </p:sp>
-      <p:sp>
-        <p:nvSpPr>
-          <p:cNvPr id="18" name="Rectangle 17"/>
-          <p:cNvSpPr/>
-          <p:nvPr/>
-        </p:nvSpPr>
-        <p:spPr>
-          <a:xfrm>
-            <a:off x="7022592" y="0"/>
-            <a:ext cx="5169103" cy="6858000"/>
-          </a:xfrm>
-          <a:prstGeom prst="rect">
-            <a:avLst/>
-          </a:prstGeom>
-          <a:solidFill>
-            <a:srgbClr val="009CD6"/>
-          </a:solidFill>
-          <a:ln>
-            <a:noFill/>
-          </a:ln>
-          <a:effectLst/>
-        </p:spPr>
-        <p:style>
-          <a:lnRef idx="1">
-            <a:schemeClr val="accent1"/>
-          </a:lnRef>
-          <a:fillRef idx="3">
-            <a:schemeClr val="accent1"/>
-          </a:fillRef>
-          <a:effectRef idx="2">
-            <a:schemeClr val="accent1"/>
-          </a:effectRef>
-          <a:fontRef idx="minor">
-            <a:schemeClr val="lt1"/>
-          </a:fontRef>
-        </p:style>
-        <p:txBody>
-          <a:bodyPr rtlCol="0" anchor="ctr"/>
-          <a:lstStyle/>
-          <a:p>
-            <a:pPr algn="ctr"/>
-          </a:p>
-        </p:txBody>
-      </p:sp>
-      <p:sp>
-        <p:nvSpPr>
-          <p:cNvPr id="19" name="TextBox 18"/>
-          <p:cNvSpPr txBox="1"/>
-          <p:nvPr/>
-        </p:nvSpPr>
-        <p:spPr>
-          <a:xfrm>
-            <a:off x="7452360" y="457200"/>
-            <a:ext cx="4297680" cy="457200"/>
-          </a:xfrm>
-          <a:prstGeom prst="rect">
-            <a:avLst/>
-          </a:prstGeom>
-          <a:noFill/>
-        </p:spPr>
-        <p:txBody>
-          <a:bodyPr wrap="square">
-            <a:spAutoFit/>
-          </a:bodyPr>
-          <a:lstStyle/>
-          <a:p>
-            <a:r>
-              <a:rPr sz="1100" b="1" i="0">
-                <a:solidFill>
-                  <a:srgbClr val="E5F5FB"/>
-                </a:solidFill>
-                <a:latin typeface="Arial"/>
-              </a:rPr>
-              <a:t>THE LIFECYCLE THIS MODULE TEACHES</a:t>
-            </a:r>
-          </a:p>
-        </p:txBody>
-      </p:sp>
-      <p:sp>
-        <p:nvSpPr>
-          <p:cNvPr id="20" name="Rounded Rectangle 19"/>
-          <p:cNvSpPr/>
-          <p:nvPr/>
-        </p:nvSpPr>
-        <p:spPr>
-          <a:xfrm>
-            <a:off x="7452360" y="960120"/>
-            <a:ext cx="3840480" cy="658368"/>
-          </a:xfrm>
-          <a:prstGeom prst="roundRect">
-            <a:avLst>
-              <a:gd name="adj" fmla="val 14000"/>
-            </a:avLst>
-          </a:prstGeom>
-          <a:solidFill>
-            <a:srgbClr val="FFFFFF"/>
-          </a:solidFill>
-          <a:ln>
-            <a:noFill/>
-          </a:ln>
-          <a:effectLst/>
-        </p:spPr>
-        <p:style>
-          <a:lnRef idx="1">
-            <a:schemeClr val="accent1"/>
-          </a:lnRef>
-          <a:fillRef idx="3">
-            <a:schemeClr val="accent1"/>
-          </a:fillRef>
-          <a:effectRef idx="2">
-            <a:schemeClr val="accent1"/>
-          </a:effectRef>
-          <a:fontRef idx="minor">
-            <a:schemeClr val="lt1"/>
-          </a:fontRef>
-        </p:style>
-        <p:txBody>
-          <a:bodyPr rtlCol="0" anchor="ctr" lIns="164592" wrap="square"/>
-          <a:lstStyle/>
-          <a:p>
-            <a:pPr algn="ctr"/>
-            <a:r>
-              <a:rPr sz="1500" b="1" i="0">
-                <a:solidFill>
-                  <a:srgbClr val="1A1A1A"/>
-                </a:solidFill>
-                <a:latin typeface="Arial"/>
-              </a:rPr>
-              <a:t>Discover</a:t>
-            </a:r>
-          </a:p>
-        </p:txBody>
-      </p:sp>
-      <p:sp>
-        <p:nvSpPr>
-          <p:cNvPr id="21" name="Diamond 20"/>
-          <p:cNvSpPr/>
-          <p:nvPr/>
-        </p:nvSpPr>
-        <p:spPr>
-          <a:xfrm>
-            <a:off x="7333488" y="1677924"/>
-            <a:ext cx="128016" cy="128016"/>
-          </a:xfrm>
-          <a:prstGeom prst="diamond">
-            <a:avLst/>
-          </a:prstGeom>
-          <a:solidFill>
-            <a:srgbClr val="E5F5FB"/>
-          </a:solidFill>
-          <a:ln>
-            <a:noFill/>
-          </a:ln>
-          <a:effectLst/>
-        </p:spPr>
-        <p:style>
-          <a:lnRef idx="1">
-            <a:schemeClr val="accent1"/>
-          </a:lnRef>
-          <a:fillRef idx="3">
-            <a:schemeClr val="accent1"/>
-          </a:fillRef>
-          <a:effectRef idx="2">
-            <a:schemeClr val="accent1"/>
-          </a:effectRef>
-          <a:fontRef idx="minor">
-            <a:schemeClr val="lt1"/>
-          </a:fontRef>
-        </p:style>
-        <p:txBody>
-          <a:bodyPr rtlCol="0" anchor="ctr"/>
-          <a:lstStyle/>
-          <a:p>
-            <a:pPr algn="ctr"/>
-          </a:p>
-        </p:txBody>
-      </p:sp>
-      <p:sp>
-        <p:nvSpPr>
-          <p:cNvPr id="22" name="Rounded Rectangle 21"/>
-          <p:cNvSpPr/>
-          <p:nvPr/>
-        </p:nvSpPr>
-        <p:spPr>
-          <a:xfrm>
-            <a:off x="7452360" y="1892808"/>
-            <a:ext cx="3840480" cy="658368"/>
-          </a:xfrm>
-          <a:prstGeom prst="roundRect">
-            <a:avLst>
-              <a:gd name="adj" fmla="val 14000"/>
-            </a:avLst>
-          </a:prstGeom>
-          <a:solidFill>
-            <a:srgbClr val="FFFFFF"/>
-          </a:solidFill>
-          <a:ln>
-            <a:noFill/>
-          </a:ln>
-          <a:effectLst/>
-        </p:spPr>
-        <p:style>
-          <a:lnRef idx="1">
-            <a:schemeClr val="accent1"/>
-          </a:lnRef>
-          <a:fillRef idx="3">
-            <a:schemeClr val="accent1"/>
-          </a:fillRef>
-          <a:effectRef idx="2">
-            <a:schemeClr val="accent1"/>
-          </a:effectRef>
-          <a:fontRef idx="minor">
-            <a:schemeClr val="lt1"/>
-          </a:fontRef>
-        </p:style>
-        <p:txBody>
-          <a:bodyPr rtlCol="0" anchor="ctr" lIns="164592" wrap="square"/>
-          <a:lstStyle/>
-          <a:p>
-            <a:pPr algn="ctr"/>
-            <a:r>
-              <a:rPr sz="1500" b="1" i="0">
-                <a:solidFill>
-                  <a:srgbClr val="1A1A1A"/>
-                </a:solidFill>
-                <a:latin typeface="Arial"/>
-              </a:rPr>
-              <a:t>Assess</a:t>
-            </a:r>
-          </a:p>
-        </p:txBody>
-      </p:sp>
-      <p:sp>
-        <p:nvSpPr>
-          <p:cNvPr id="23" name="Diamond 22"/>
-          <p:cNvSpPr/>
-          <p:nvPr/>
-        </p:nvSpPr>
-        <p:spPr>
-          <a:xfrm>
-            <a:off x="7333488" y="2610612"/>
-            <a:ext cx="128016" cy="128016"/>
-          </a:xfrm>
-          <a:prstGeom prst="diamond">
-            <a:avLst/>
-          </a:prstGeom>
-          <a:solidFill>
-            <a:srgbClr val="E5F5FB"/>
-          </a:solidFill>
-          <a:ln>
-            <a:noFill/>
-          </a:ln>
-          <a:effectLst/>
-        </p:spPr>
-        <p:style>
-          <a:lnRef idx="1">
-            <a:schemeClr val="accent1"/>
-          </a:lnRef>
-          <a:fillRef idx="3">
-            <a:schemeClr val="accent1"/>
-          </a:fillRef>
-          <a:effectRef idx="2">
-            <a:schemeClr val="accent1"/>
-          </a:effectRef>
-          <a:fontRef idx="minor">
-            <a:schemeClr val="lt1"/>
-          </a:fontRef>
-        </p:style>
-        <p:txBody>
-          <a:bodyPr rtlCol="0" anchor="ctr"/>
-          <a:lstStyle/>
-          <a:p>
-            <a:pPr algn="ctr"/>
-          </a:p>
-        </p:txBody>
-      </p:sp>
-      <p:sp>
-        <p:nvSpPr>
-          <p:cNvPr id="24" name="Rounded Rectangle 23"/>
-          <p:cNvSpPr/>
-          <p:nvPr/>
-        </p:nvSpPr>
-        <p:spPr>
-          <a:xfrm>
-            <a:off x="7452360" y="2825496"/>
-            <a:ext cx="3840480" cy="658368"/>
-          </a:xfrm>
-          <a:prstGeom prst="roundRect">
-            <a:avLst>
-              <a:gd name="adj" fmla="val 14000"/>
-            </a:avLst>
-          </a:prstGeom>
-          <a:solidFill>
-            <a:srgbClr val="FFFFFF"/>
-          </a:solidFill>
-          <a:ln>
-            <a:noFill/>
-          </a:ln>
-          <a:effectLst/>
-        </p:spPr>
-        <p:style>
-          <a:lnRef idx="1">
-            <a:schemeClr val="accent1"/>
-          </a:lnRef>
-          <a:fillRef idx="3">
-            <a:schemeClr val="accent1"/>
-          </a:fillRef>
-          <a:effectRef idx="2">
-            <a:schemeClr val="accent1"/>
-          </a:effectRef>
-          <a:fontRef idx="minor">
-            <a:schemeClr val="lt1"/>
-          </a:fontRef>
-        </p:style>
-        <p:txBody>
-          <a:bodyPr rtlCol="0" anchor="ctr" lIns="164592" wrap="square"/>
-          <a:lstStyle/>
-          <a:p>
-            <a:pPr algn="ctr"/>
-            <a:r>
-              <a:rPr sz="1500" b="1" i="0">
-                <a:solidFill>
-                  <a:srgbClr val="1A1A1A"/>
-                </a:solidFill>
-                <a:latin typeface="Arial"/>
-              </a:rPr>
-              <a:t>Adapt</a:t>
-            </a:r>
-          </a:p>
-        </p:txBody>
-      </p:sp>
-      <p:sp>
-        <p:nvSpPr>
-          <p:cNvPr id="25" name="Diamond 24"/>
-          <p:cNvSpPr/>
-          <p:nvPr/>
-        </p:nvSpPr>
-        <p:spPr>
-          <a:xfrm>
-            <a:off x="7333488" y="3543300"/>
-            <a:ext cx="128016" cy="128016"/>
-          </a:xfrm>
-          <a:prstGeom prst="diamond">
-            <a:avLst/>
-          </a:prstGeom>
-          <a:solidFill>
-            <a:srgbClr val="E5F5FB"/>
-          </a:solidFill>
-          <a:ln>
-            <a:noFill/>
-          </a:ln>
-          <a:effectLst/>
-        </p:spPr>
-        <p:style>
-          <a:lnRef idx="1">
-            <a:schemeClr val="accent1"/>
-          </a:lnRef>
-          <a:fillRef idx="3">
-            <a:schemeClr val="accent1"/>
-          </a:fillRef>
-          <a:effectRef idx="2">
-            <a:schemeClr val="accent1"/>
-          </a:effectRef>
-          <a:fontRef idx="minor">
-            <a:schemeClr val="lt1"/>
-          </a:fontRef>
-        </p:style>
-        <p:txBody>
-          <a:bodyPr rtlCol="0" anchor="ctr"/>
-          <a:lstStyle/>
-          <a:p>
-            <a:pPr algn="ctr"/>
-          </a:p>
-        </p:txBody>
-      </p:sp>
-      <p:sp>
-        <p:nvSpPr>
-          <p:cNvPr id="26" name="Rounded Rectangle 25"/>
-          <p:cNvSpPr/>
-          <p:nvPr/>
-        </p:nvSpPr>
-        <p:spPr>
-          <a:xfrm>
-            <a:off x="7452360" y="3758184"/>
-            <a:ext cx="3840480" cy="658368"/>
-          </a:xfrm>
-          <a:prstGeom prst="roundRect">
-            <a:avLst>
-              <a:gd name="adj" fmla="val 14000"/>
-            </a:avLst>
-          </a:prstGeom>
-          <a:solidFill>
-            <a:srgbClr val="FFFFFF"/>
-          </a:solidFill>
-          <a:ln>
-            <a:noFill/>
-          </a:ln>
-          <a:effectLst/>
-        </p:spPr>
-        <p:style>
-          <a:lnRef idx="1">
-            <a:schemeClr val="accent1"/>
-          </a:lnRef>
-          <a:fillRef idx="3">
-            <a:schemeClr val="accent1"/>
-          </a:fillRef>
-          <a:effectRef idx="2">
-            <a:schemeClr val="accent1"/>
-          </a:effectRef>
-          <a:fontRef idx="minor">
-            <a:schemeClr val="lt1"/>
-          </a:fontRef>
-        </p:style>
-        <p:txBody>
-          <a:bodyPr rtlCol="0" anchor="ctr" lIns="164592" wrap="square"/>
-          <a:lstStyle/>
-          <a:p>
-            <a:pPr algn="ctr"/>
-            <a:r>
-              <a:rPr sz="1500" b="1" i="0">
-                <a:solidFill>
-                  <a:srgbClr val="1A1A1A"/>
-                </a:solidFill>
-                <a:latin typeface="Arial"/>
-              </a:rPr>
-              <a:t>Plan</a:t>
-            </a:r>
-          </a:p>
-        </p:txBody>
-      </p:sp>
-      <p:sp>
-        <p:nvSpPr>
-          <p:cNvPr id="27" name="Diamond 26"/>
-          <p:cNvSpPr/>
-          <p:nvPr/>
-        </p:nvSpPr>
-        <p:spPr>
-          <a:xfrm>
-            <a:off x="7333488" y="4475988"/>
-            <a:ext cx="128016" cy="128016"/>
-          </a:xfrm>
-          <a:prstGeom prst="diamond">
-            <a:avLst/>
-          </a:prstGeom>
-          <a:solidFill>
-            <a:srgbClr val="E5F5FB"/>
-          </a:solidFill>
-          <a:ln>
-            <a:noFill/>
-          </a:ln>
-          <a:effectLst/>
-        </p:spPr>
-        <p:style>
-          <a:lnRef idx="1">
-            <a:schemeClr val="accent1"/>
-          </a:lnRef>
-          <a:fillRef idx="3">
-            <a:schemeClr val="accent1"/>
-          </a:fillRef>
-          <a:effectRef idx="2">
-            <a:schemeClr val="accent1"/>
-          </a:effectRef>
-          <a:fontRef idx="minor">
-            <a:schemeClr val="lt1"/>
-          </a:fontRef>
-        </p:style>
-        <p:txBody>
-          <a:bodyPr rtlCol="0" anchor="ctr"/>
-          <a:lstStyle/>
-          <a:p>
-            <a:pPr algn="ctr"/>
-          </a:p>
-        </p:txBody>
-      </p:sp>
-      <p:sp>
-        <p:nvSpPr>
-          <p:cNvPr id="28" name="Rounded Rectangle 27"/>
-          <p:cNvSpPr/>
-          <p:nvPr/>
-        </p:nvSpPr>
-        <p:spPr>
-          <a:xfrm>
-            <a:off x="7452360" y="4690872"/>
-            <a:ext cx="3840480" cy="658368"/>
-          </a:xfrm>
-          <a:prstGeom prst="roundRect">
-            <a:avLst>
-              <a:gd name="adj" fmla="val 14000"/>
-            </a:avLst>
-          </a:prstGeom>
-          <a:solidFill>
-            <a:srgbClr val="006E96"/>
-          </a:solidFill>
-          <a:ln>
-            <a:noFill/>
-          </a:ln>
-          <a:effectLst/>
-        </p:spPr>
-        <p:style>
-          <a:lnRef idx="1">
-            <a:schemeClr val="accent1"/>
-          </a:lnRef>
-          <a:fillRef idx="3">
-            <a:schemeClr val="accent1"/>
-          </a:fillRef>
-          <a:effectRef idx="2">
-            <a:schemeClr val="accent1"/>
-          </a:effectRef>
-          <a:fontRef idx="minor">
-            <a:schemeClr val="lt1"/>
-          </a:fontRef>
-        </p:style>
-        <p:txBody>
-          <a:bodyPr rtlCol="0" anchor="ctr" lIns="164592" wrap="square"/>
-          <a:lstStyle/>
-          <a:p>
-            <a:pPr algn="ctr"/>
-            <a:r>
-              <a:rPr sz="1500" b="1" i="0">
-                <a:solidFill>
-                  <a:srgbClr val="FFFFFF"/>
-                </a:solidFill>
-                <a:latin typeface="Arial"/>
-              </a:rPr>
-              <a:t>Execute &amp; Govern</a:t>
-            </a:r>
-          </a:p>
-        </p:txBody>
-      </p:sp>
-      <p:sp>
-        <p:nvSpPr>
-          <p:cNvPr id="29" name="TextBox 28"/>
-          <p:cNvSpPr txBox="1"/>
-          <p:nvPr/>
-        </p:nvSpPr>
-        <p:spPr>
-          <a:xfrm>
-            <a:off x="7452360" y="5806440"/>
-            <a:ext cx="4297680" cy="731520"/>
-          </a:xfrm>
-          <a:prstGeom prst="rect">
-            <a:avLst/>
-          </a:prstGeom>
-          <a:noFill/>
-        </p:spPr>
-        <p:txBody>
-          <a:bodyPr wrap="square">
-            <a:spAutoFit/>
-          </a:bodyPr>
-          <a:lstStyle/>
-          <a:p>
-            <a:r>
-              <a:rPr sz="1200" b="0" i="0">
-                <a:solidFill>
-                  <a:srgbClr val="FFFFFF"/>
-                </a:solidFill>
-                <a:latin typeface="Arial"/>
-              </a:rPr>
-              <a:t>4 sign-offs · 6 months to a roadmap · then ongoing</a:t>
-            </a:r>
-          </a:p>
-        </p:txBody>
-      </p:sp>
-    </p:spTree>
-    <p:extLst>
-      <p:ext uri="{BB962C8B-B14F-4D97-AF65-F5344CB8AC3E}">
-        <p14:creationId xmlns:p14="http://schemas.microsoft.com/office/powerpoint/2010/main" val="1196800265"/>
-      </p:ext>
-    </p:extLst>
-  </p:cSld>
-  <p:clrMapOvr>
-    <a:masterClrMapping/>
-  </p:clrMapOvr>
-</p:sld>
-</file>
-
-<file path=ppt/slides/slide15.xml><?xml version="1.0" encoding="utf-8"?>
-<p:sld xmlns:a="http://schemas.openxmlformats.org/drawingml/2006/main" xmlns:p="http://schemas.openxmlformats.org/presentationml/2006/main" xmlns:r="http://schemas.openxmlformats.org/officeDocument/2006/relationships">
-  <p:cSld>
-    <p:spTree>
-      <p:nvGrpSpPr>
-        <p:cNvPr id="1" name=""/>
-        <p:cNvGrpSpPr/>
-        <p:nvPr/>
-      </p:nvGrpSpPr>
-      <p:grpSpPr/>
-      <p:sp>
-        <p:nvSpPr>
-          <p:cNvPr id="2" name="TextBox 1"/>
-          <p:cNvSpPr txBox="1"/>
-          <p:nvPr/>
-        </p:nvSpPr>
-        <p:spPr>
-          <a:xfrm>
-            <a:off x="822960" y="822960"/>
-            <a:ext cx="7315200" cy="457200"/>
-          </a:xfrm>
-          <a:prstGeom prst="rect">
-            <a:avLst/>
-          </a:prstGeom>
-          <a:noFill/>
-        </p:spPr>
-        <p:txBody>
-          <a:bodyPr wrap="square">
-            <a:spAutoFit/>
-          </a:bodyPr>
-          <a:lstStyle/>
-          <a:p>
-            <a:r>
-              <a:rPr sz="1200" b="1" i="0">
-                <a:solidFill>
-                  <a:srgbClr val="595959"/>
-                </a:solidFill>
-                <a:latin typeface="Arial"/>
-              </a:rPr>
-              <a:t>KP1 · MODULE 1 · VIDEO 1.3</a:t>
-            </a:r>
-          </a:p>
-        </p:txBody>
-      </p:sp>
-      <p:sp>
-        <p:nvSpPr>
-          <p:cNvPr id="3" name="TextBox 2"/>
-          <p:cNvSpPr txBox="1"/>
-          <p:nvPr/>
-        </p:nvSpPr>
-        <p:spPr>
-          <a:xfrm>
-            <a:off x="822960" y="1828800"/>
-            <a:ext cx="2011680" cy="1097280"/>
-          </a:xfrm>
-          <a:prstGeom prst="rect">
-            <a:avLst/>
-          </a:prstGeom>
-          <a:noFill/>
-        </p:spPr>
-        <p:txBody>
-          <a:bodyPr wrap="square">
-            <a:spAutoFit/>
-          </a:bodyPr>
-          <a:lstStyle/>
-          <a:p>
-            <a:r>
-              <a:rPr sz="6000" b="1" i="0">
-                <a:solidFill>
-                  <a:srgbClr val="009CD6"/>
-                </a:solidFill>
-                <a:latin typeface="Arial"/>
-              </a:rPr>
-              <a:t>1.3</a:t>
-            </a:r>
-          </a:p>
-        </p:txBody>
-      </p:sp>
-      <p:sp>
-        <p:nvSpPr>
-          <p:cNvPr id="4" name="TextBox 3"/>
-          <p:cNvSpPr txBox="1"/>
-          <p:nvPr/>
-        </p:nvSpPr>
-        <p:spPr>
-          <a:xfrm>
-            <a:off x="822960" y="2880360"/>
-            <a:ext cx="9601200" cy="1371600"/>
-          </a:xfrm>
-          <a:prstGeom prst="rect">
-            <a:avLst/>
-          </a:prstGeom>
-          <a:noFill/>
-        </p:spPr>
-        <p:txBody>
-          <a:bodyPr wrap="square">
-            <a:spAutoFit/>
-          </a:bodyPr>
-          <a:lstStyle/>
-          <a:p>
-            <a:r>
-              <a:rPr sz="3400" b="1" i="0">
-                <a:solidFill>
-                  <a:srgbClr val="1A1A1A"/>
-                </a:solidFill>
-                <a:latin typeface="Arial"/>
-              </a:rPr>
-              <a:t>Why projects can't do this themselves</a:t>
-            </a:r>
-          </a:p>
-        </p:txBody>
-      </p:sp>
-      <p:sp>
-        <p:nvSpPr>
-          <p:cNvPr id="5" name="TextBox 4"/>
-          <p:cNvSpPr txBox="1"/>
-          <p:nvPr/>
-        </p:nvSpPr>
-        <p:spPr>
-          <a:xfrm>
-            <a:off x="822960" y="4343400"/>
-            <a:ext cx="9875520" cy="1554480"/>
-          </a:xfrm>
-          <a:prstGeom prst="rect">
-            <a:avLst/>
-          </a:prstGeom>
-          <a:noFill/>
-        </p:spPr>
-        <p:txBody>
-          <a:bodyPr wrap="square">
-            <a:spAutoFit/>
-          </a:bodyPr>
-          <a:lstStyle/>
-          <a:p>
-            <a:r>
-              <a:rPr sz="1700" b="0" i="1">
-                <a:solidFill>
-                  <a:srgbClr val="595959"/>
-                </a:solidFill>
-                <a:latin typeface="Arial"/>
-              </a:rPr>
-              <a:t>Procurement rules can require interoperability. They cannot deliver it. Only planning at the level of the whole government, supported by reference architectures, can.</a:t>
-            </a:r>
-          </a:p>
-        </p:txBody>
-      </p:sp>
-      <p:sp>
-        <p:nvSpPr>
-          <p:cNvPr id="6" name="TextBox 5"/>
-          <p:cNvSpPr txBox="1"/>
-          <p:nvPr/>
-        </p:nvSpPr>
-        <p:spPr>
-          <a:xfrm>
-            <a:off x="822960" y="5989320"/>
-            <a:ext cx="7315200" cy="365760"/>
-          </a:xfrm>
-          <a:prstGeom prst="rect">
-            <a:avLst/>
-          </a:prstGeom>
-          <a:noFill/>
-        </p:spPr>
-        <p:txBody>
-          <a:bodyPr wrap="square">
-            <a:spAutoFit/>
-          </a:bodyPr>
-          <a:lstStyle/>
-          <a:p>
-            <a:r>
-              <a:rPr sz="1200" b="0" i="0">
-                <a:solidFill>
-                  <a:srgbClr val="595959"/>
-                </a:solidFill>
-                <a:latin typeface="Arial"/>
-              </a:rPr>
-              <a:t>standalone video · voice-over on text slides</a:t>
-            </a:r>
-          </a:p>
-        </p:txBody>
-      </p:sp>
-    </p:spTree>
-  </p:cSld>
-  <p:clrMapOvr>
-    <a:masterClrMapping/>
-  </p:clrMapOvr>
-</p:sld>
-</file>
-
-<file path=ppt/slides/slide16.xml><?xml version="1.0" encoding="utf-8"?>
-<p:sld xmlns:a="http://schemas.openxmlformats.org/drawingml/2006/main" xmlns:p="http://schemas.openxmlformats.org/presentationml/2006/main" xmlns:r="http://schemas.openxmlformats.org/officeDocument/2006/relationships">
-  <p:cSld>
-    <p:spTree>
-      <p:nvGrpSpPr>
-        <p:cNvPr id="1" name=""/>
-        <p:cNvGrpSpPr/>
-        <p:nvPr/>
-      </p:nvGrpSpPr>
-      <p:grpSpPr/>
-      <p:sp>
-        <p:nvSpPr>
-          <p:cNvPr id="2" name="Rectangle 1"/>
-          <p:cNvSpPr/>
-          <p:nvPr/>
-        </p:nvSpPr>
-        <p:spPr>
-          <a:xfrm>
-            <a:off x="457200" y="384048"/>
-            <a:ext cx="45720" cy="256032"/>
-          </a:xfrm>
-          <a:prstGeom prst="rect">
-            <a:avLst/>
-          </a:prstGeom>
-          <a:solidFill>
-            <a:srgbClr val="009CD6"/>
-          </a:solidFill>
-          <a:ln>
-            <a:noFill/>
-          </a:ln>
-          <a:effectLst/>
-        </p:spPr>
-        <p:style>
-          <a:lnRef idx="1">
-            <a:schemeClr val="accent1"/>
-          </a:lnRef>
-          <a:fillRef idx="3">
-            <a:schemeClr val="accent1"/>
-          </a:fillRef>
-          <a:effectRef idx="2">
-            <a:schemeClr val="accent1"/>
-          </a:effectRef>
-          <a:fontRef idx="minor">
-            <a:schemeClr val="lt1"/>
-          </a:fontRef>
-        </p:style>
-        <p:txBody>
-          <a:bodyPr rtlCol="0" anchor="ctr"/>
-          <a:lstStyle/>
-          <a:p>
-            <a:pPr algn="ctr"/>
-          </a:p>
-        </p:txBody>
-      </p:sp>
-      <p:sp>
-        <p:nvSpPr>
-          <p:cNvPr id="3" name="TextBox 2"/>
-          <p:cNvSpPr txBox="1"/>
-          <p:nvPr/>
-        </p:nvSpPr>
-        <p:spPr>
-          <a:xfrm>
-            <a:off x="621792" y="274320"/>
-            <a:ext cx="11247120" cy="914400"/>
-          </a:xfrm>
-          <a:prstGeom prst="rect">
-            <a:avLst/>
-          </a:prstGeom>
-          <a:noFill/>
-        </p:spPr>
-        <p:txBody>
-          <a:bodyPr wrap="square">
-            <a:spAutoFit/>
-          </a:bodyPr>
-          <a:lstStyle/>
-          <a:p>
-            <a:r>
-              <a:rPr sz="2800" b="1" i="0">
-                <a:solidFill>
-                  <a:srgbClr val="1A1A1A"/>
-                </a:solidFill>
-                <a:latin typeface="Arial"/>
-              </a:rPr>
-              <a:t>Each project is rational — and builds its own</a:t>
-            </a:r>
-          </a:p>
-        </p:txBody>
-      </p:sp>
-      <p:sp>
-        <p:nvSpPr>
-          <p:cNvPr id="4" name="TextBox 3"/>
-          <p:cNvSpPr txBox="1"/>
-          <p:nvPr/>
-        </p:nvSpPr>
-        <p:spPr>
-          <a:xfrm>
-            <a:off x="658368" y="1417320"/>
-            <a:ext cx="10984687" cy="1569720"/>
-          </a:xfrm>
-          <a:prstGeom prst="rect">
-            <a:avLst/>
-          </a:prstGeom>
-          <a:noFill/>
-        </p:spPr>
-        <p:txBody>
-          <a:bodyPr wrap="square">
-            <a:spAutoFit/>
-          </a:bodyPr>
-          <a:lstStyle/>
-          <a:p>
-            <a:pPr>
-              <a:spcAft>
-                <a:spcPts val="300"/>
-              </a:spcAft>
-            </a:pPr>
-            <a:r>
-              <a:rPr sz="2000" b="1" i="0">
-                <a:solidFill>
-                  <a:srgbClr val="1A1A1A"/>
-                </a:solidFill>
-                <a:latin typeface="Arial"/>
-              </a:rPr>
-              <a:t>The question every project asks</a:t>
-            </a:r>
-          </a:p>
-          <a:p>
-            <a:pPr>
-              <a:spcAft>
-                <a:spcPts val="300"/>
-              </a:spcAft>
-            </a:pPr>
-            <a:r>
-              <a:rPr sz="1600" b="0" i="0">
-                <a:solidFill>
-                  <a:srgbClr val="595959"/>
-                </a:solidFill>
-                <a:latin typeface="Arial"/>
-              </a:rPr>
-              <a:t>“How do we ship on time and on budget?”</a:t>
-            </a:r>
-          </a:p>
-        </p:txBody>
-      </p:sp>
-      <p:sp>
-        <p:nvSpPr>
-          <p:cNvPr id="5" name="Rectangle 4"/>
-          <p:cNvSpPr/>
-          <p:nvPr/>
-        </p:nvSpPr>
-        <p:spPr>
-          <a:xfrm>
-            <a:off x="621792" y="2991612"/>
-            <a:ext cx="10881360" cy="12700"/>
-          </a:xfrm>
-          <a:prstGeom prst="rect">
-            <a:avLst/>
-          </a:prstGeom>
-          <a:solidFill>
-            <a:srgbClr val="DDECF4"/>
-          </a:solidFill>
-          <a:ln>
-            <a:noFill/>
-          </a:ln>
-          <a:effectLst/>
-        </p:spPr>
-        <p:style>
-          <a:lnRef idx="1">
-            <a:schemeClr val="accent1"/>
-          </a:lnRef>
-          <a:fillRef idx="3">
-            <a:schemeClr val="accent1"/>
-          </a:fillRef>
-          <a:effectRef idx="2">
-            <a:schemeClr val="accent1"/>
-          </a:effectRef>
-          <a:fontRef idx="minor">
-            <a:schemeClr val="lt1"/>
-          </a:fontRef>
-        </p:style>
-        <p:txBody>
-          <a:bodyPr rtlCol="0" anchor="ctr"/>
-          <a:lstStyle/>
-          <a:p>
-            <a:pPr algn="ctr"/>
-          </a:p>
-        </p:txBody>
-      </p:sp>
-      <p:sp>
-        <p:nvSpPr>
-          <p:cNvPr id="6" name="TextBox 5"/>
-          <p:cNvSpPr txBox="1"/>
-          <p:nvPr/>
-        </p:nvSpPr>
-        <p:spPr>
-          <a:xfrm>
-            <a:off x="658368" y="3032760"/>
-            <a:ext cx="10984687" cy="1569720"/>
-          </a:xfrm>
-          <a:prstGeom prst="rect">
-            <a:avLst/>
-          </a:prstGeom>
-          <a:noFill/>
-        </p:spPr>
-        <p:txBody>
-          <a:bodyPr wrap="square">
-            <a:spAutoFit/>
-          </a:bodyPr>
-          <a:lstStyle/>
-          <a:p>
-            <a:pPr>
-              <a:spcAft>
-                <a:spcPts val="300"/>
-              </a:spcAft>
-            </a:pPr>
-            <a:r>
-              <a:rPr sz="2000" b="1" i="0">
-                <a:solidFill>
-                  <a:srgbClr val="1A1A1A"/>
-                </a:solidFill>
-                <a:latin typeface="Arial"/>
-              </a:rPr>
-              <a:t>What re-use costs the project</a:t>
-            </a:r>
-          </a:p>
-          <a:p>
-            <a:pPr>
-              <a:spcAft>
-                <a:spcPts val="300"/>
-              </a:spcAft>
-            </a:pPr>
-            <a:r>
-              <a:rPr sz="1600" b="0" i="0">
-                <a:solidFill>
-                  <a:srgbClr val="595959"/>
-                </a:solidFill>
-                <a:latin typeface="Arial"/>
-              </a:rPr>
-              <a:t>Learn another ministry’s system. Negotiate with their team. Accept their delays.</a:t>
-            </a:r>
-          </a:p>
-        </p:txBody>
-      </p:sp>
-      <p:sp>
-        <p:nvSpPr>
-          <p:cNvPr id="7" name="Rectangle 6"/>
-          <p:cNvSpPr/>
-          <p:nvPr/>
-        </p:nvSpPr>
-        <p:spPr>
-          <a:xfrm>
-            <a:off x="621792" y="4607052"/>
-            <a:ext cx="10881360" cy="12700"/>
-          </a:xfrm>
-          <a:prstGeom prst="rect">
-            <a:avLst/>
-          </a:prstGeom>
-          <a:solidFill>
-            <a:srgbClr val="DDECF4"/>
-          </a:solidFill>
-          <a:ln>
-            <a:noFill/>
-          </a:ln>
-          <a:effectLst/>
-        </p:spPr>
-        <p:style>
-          <a:lnRef idx="1">
-            <a:schemeClr val="accent1"/>
-          </a:lnRef>
-          <a:fillRef idx="3">
-            <a:schemeClr val="accent1"/>
-          </a:fillRef>
-          <a:effectRef idx="2">
-            <a:schemeClr val="accent1"/>
-          </a:effectRef>
-          <a:fontRef idx="minor">
-            <a:schemeClr val="lt1"/>
-          </a:fontRef>
-        </p:style>
-        <p:txBody>
-          <a:bodyPr rtlCol="0" anchor="ctr"/>
-          <a:lstStyle/>
-          <a:p>
-            <a:pPr algn="ctr"/>
-          </a:p>
-        </p:txBody>
-      </p:sp>
-      <p:sp>
-        <p:nvSpPr>
-          <p:cNvPr id="8" name="TextBox 7"/>
-          <p:cNvSpPr txBox="1"/>
-          <p:nvPr/>
-        </p:nvSpPr>
-        <p:spPr>
-          <a:xfrm>
-            <a:off x="658368" y="4648200"/>
-            <a:ext cx="10984687" cy="1569720"/>
-          </a:xfrm>
-          <a:prstGeom prst="rect">
-            <a:avLst/>
-          </a:prstGeom>
-          <a:noFill/>
-        </p:spPr>
-        <p:txBody>
-          <a:bodyPr wrap="square">
-            <a:spAutoFit/>
-          </a:bodyPr>
-          <a:lstStyle/>
-          <a:p>
-            <a:pPr>
-              <a:spcAft>
-                <a:spcPts val="300"/>
-              </a:spcAft>
-            </a:pPr>
-            <a:r>
-              <a:rPr sz="2000" b="1" i="0">
-                <a:solidFill>
-                  <a:srgbClr val="1A1A1A"/>
-                </a:solidFill>
-                <a:latin typeface="Arial"/>
-              </a:rPr>
-              <a:t>So the team builds its own — and that is not a failure of discipline</a:t>
-            </a:r>
-          </a:p>
-          <a:p>
-            <a:pPr>
-              <a:spcAft>
-                <a:spcPts val="300"/>
-              </a:spcAft>
-            </a:pPr>
-            <a:r>
-              <a:rPr sz="1600" b="0" i="0">
-                <a:solidFill>
-                  <a:srgbClr val="595959"/>
-                </a:solidFill>
-                <a:latin typeface="Arial"/>
-              </a:rPr>
-              <a:t>Building your own version is faster and simpler. The project is doing exactly what it was funded to do.</a:t>
-            </a:r>
-          </a:p>
-        </p:txBody>
-      </p:sp>
-      <p:sp>
-        <p:nvSpPr>
-          <p:cNvPr id="9" name="TextBox 8"/>
-          <p:cNvSpPr txBox="1"/>
-          <p:nvPr/>
-        </p:nvSpPr>
-        <p:spPr>
-          <a:xfrm>
-            <a:off x="457200" y="6473952"/>
-            <a:ext cx="7772400" cy="292608"/>
-          </a:xfrm>
-          <a:prstGeom prst="rect">
-            <a:avLst/>
-          </a:prstGeom>
-          <a:noFill/>
-        </p:spPr>
-        <p:txBody>
-          <a:bodyPr wrap="square">
-            <a:spAutoFit/>
-          </a:bodyPr>
-          <a:lstStyle/>
-          <a:p>
-            <a:r>
-              <a:rPr sz="900" b="0" i="0">
-                <a:solidFill>
-                  <a:srgbClr val="595959"/>
-                </a:solidFill>
-                <a:latin typeface="Arial"/>
-              </a:rPr>
-              <a:t>1.3 · Why projects can't do this themselves</a:t>
-            </a:r>
-          </a:p>
-        </p:txBody>
-      </p:sp>
-    </p:spTree>
-  </p:cSld>
-  <p:clrMapOvr>
-    <a:masterClrMapping/>
-  </p:clrMapOvr>
-</p:sld>
-</file>
-
 <file path=ppt/slides/slide17.xml><?xml version="1.0" encoding="utf-8"?>
 <p:sld xmlns:a="http://schemas.openxmlformats.org/drawingml/2006/main" xmlns:p="http://schemas.openxmlformats.org/presentationml/2006/main" xmlns:r="http://schemas.openxmlformats.org/officeDocument/2006/relationships">
   <p:cSld>
@@ -13079,58 +11620,14 @@
       <p:grpSpPr/>
       <p:sp>
         <p:nvSpPr>
-          <p:cNvPr id="2" name="Rectangle 1"/>
-          <p:cNvSpPr/>
-          <p:nvPr/>
-        </p:nvSpPr>
-        <p:spPr>
-          <a:xfrm>
-            <a:off x="457200" y="384048"/>
-            <a:ext cx="45720" cy="256032"/>
-          </a:xfrm>
-          <a:prstGeom prst="rect">
-            <a:avLst/>
-          </a:prstGeom>
-          <a:solidFill>
-            <a:srgbClr val="009CD6"/>
-          </a:solidFill>
-          <a:ln>
-            <a:noFill/>
-          </a:ln>
-          <a:effectLst/>
-        </p:spPr>
-        <p:style>
-          <a:lnRef idx="1">
-            <a:schemeClr val="accent1"/>
-          </a:lnRef>
-          <a:fillRef idx="3">
-            <a:schemeClr val="accent1"/>
-          </a:fillRef>
-          <a:effectRef idx="2">
-            <a:schemeClr val="accent1"/>
-          </a:effectRef>
-          <a:fontRef idx="minor">
-            <a:schemeClr val="lt1"/>
-          </a:fontRef>
-        </p:style>
-        <p:txBody>
-          <a:bodyPr rtlCol="0" anchor="ctr"/>
-          <a:lstStyle/>
-          <a:p>
-            <a:pPr algn="ctr"/>
-          </a:p>
-        </p:txBody>
-      </p:sp>
-      <p:sp>
-        <p:nvSpPr>
-          <p:cNvPr id="3" name="TextBox 2"/>
+          <p:cNvPr id="2" name="TextBox 1"/>
           <p:cNvSpPr txBox="1"/>
           <p:nvPr/>
         </p:nvSpPr>
         <p:spPr>
           <a:xfrm>
-            <a:off x="621792" y="274320"/>
-            <a:ext cx="11247120" cy="914400"/>
+            <a:off x="822960" y="822960"/>
+            <a:ext cx="7315200" cy="457200"/>
           </a:xfrm>
           <a:prstGeom prst="rect">
             <a:avLst/>
@@ -13144,60 +11641,82 @@
           <a:lstStyle/>
           <a:p>
             <a:r>
-              <a:rPr sz="2800" b="1" i="0">
+              <a:rPr sz="1200" b="1" i="0">
+                <a:solidFill>
+                  <a:srgbClr val="595959"/>
+                </a:solidFill>
+                <a:latin typeface="Arial"/>
+              </a:rPr>
+              <a:t>KP1 · MODULE 1 · VIDEO 1.3</a:t>
+            </a:r>
+          </a:p>
+        </p:txBody>
+      </p:sp>
+      <p:sp>
+        <p:nvSpPr>
+          <p:cNvPr id="3" name="TextBox 2"/>
+          <p:cNvSpPr txBox="1"/>
+          <p:nvPr/>
+        </p:nvSpPr>
+        <p:spPr>
+          <a:xfrm>
+            <a:off x="822960" y="1828800"/>
+            <a:ext cx="2011680" cy="1097280"/>
+          </a:xfrm>
+          <a:prstGeom prst="rect">
+            <a:avLst/>
+          </a:prstGeom>
+          <a:noFill/>
+        </p:spPr>
+        <p:txBody>
+          <a:bodyPr wrap="square">
+            <a:spAutoFit/>
+          </a:bodyPr>
+          <a:lstStyle/>
+          <a:p>
+            <a:r>
+              <a:rPr sz="6000" b="1" i="0">
+                <a:solidFill>
+                  <a:srgbClr val="009CD6"/>
+                </a:solidFill>
+                <a:latin typeface="Arial"/>
+              </a:rPr>
+              <a:t>1.3</a:t>
+            </a:r>
+          </a:p>
+        </p:txBody>
+      </p:sp>
+      <p:sp>
+        <p:nvSpPr>
+          <p:cNvPr id="4" name="TextBox 3"/>
+          <p:cNvSpPr txBox="1"/>
+          <p:nvPr/>
+        </p:nvSpPr>
+        <p:spPr>
+          <a:xfrm>
+            <a:off x="822960" y="2880360"/>
+            <a:ext cx="9601200" cy="1371600"/>
+          </a:xfrm>
+          <a:prstGeom prst="rect">
+            <a:avLst/>
+          </a:prstGeom>
+          <a:noFill/>
+        </p:spPr>
+        <p:txBody>
+          <a:bodyPr wrap="square">
+            <a:spAutoFit/>
+          </a:bodyPr>
+          <a:lstStyle/>
+          <a:p>
+            <a:r>
+              <a:rPr sz="3400" b="1" i="0">
                 <a:solidFill>
                   <a:srgbClr val="1A1A1A"/>
                 </a:solidFill>
                 <a:latin typeface="Arial"/>
               </a:rPr>
-              <a:t>The math changes only at whole-of-government level</a:t>
-            </a:r>
-          </a:p>
-        </p:txBody>
-      </p:sp>
-      <p:sp>
-        <p:nvSpPr>
-          <p:cNvPr id="4" name="Rounded Rectangle 3"/>
-          <p:cNvSpPr/>
-          <p:nvPr/>
-        </p:nvSpPr>
-        <p:spPr>
-          <a:xfrm>
-            <a:off x="658368" y="1645920"/>
-            <a:ext cx="2606040" cy="1554480"/>
-          </a:xfrm>
-          <a:prstGeom prst="roundRect">
-            <a:avLst>
-              <a:gd name="adj" fmla="val 4500"/>
-            </a:avLst>
-          </a:prstGeom>
-          <a:solidFill>
-            <a:srgbClr val="009CD6"/>
-          </a:solidFill>
-          <a:ln>
-            <a:noFill/>
-          </a:ln>
-          <a:effectLst/>
-        </p:spPr>
-        <p:style>
-          <a:lnRef idx="1">
-            <a:schemeClr val="accent1"/>
-          </a:lnRef>
-          <a:fillRef idx="3">
-            <a:schemeClr val="accent1"/>
-          </a:fillRef>
-          <a:effectRef idx="2">
-            <a:schemeClr val="accent1"/>
-          </a:effectRef>
-          <a:fontRef idx="minor">
-            <a:schemeClr val="lt1"/>
-          </a:fontRef>
-        </p:style>
-        <p:txBody>
-          <a:bodyPr rtlCol="0" anchor="ctr"/>
-          <a:lstStyle/>
-          <a:p>
-            <a:pPr algn="ctr"/>
+              <a:t>Why projects can't do this themselves</a:t>
+            </a:r>
           </a:p>
         </p:txBody>
       </p:sp>
@@ -13209,8 +11728,8 @@
         </p:nvSpPr>
         <p:spPr>
           <a:xfrm>
-            <a:off x="822959" y="1792224"/>
-            <a:ext cx="2276856" cy="1280160"/>
+            <a:off x="822960" y="4343400"/>
+            <a:ext cx="9875520" cy="1554480"/>
           </a:xfrm>
           <a:prstGeom prst="rect">
             <a:avLst/>
@@ -13223,196 +11742,28 @@
           </a:bodyPr>
           <a:lstStyle/>
           <a:p>
-            <a:pPr>
-              <a:spcAft>
-                <a:spcPts val="700"/>
-              </a:spcAft>
-            </a:pPr>
-            <a:r>
-              <a:rPr sz="1600" b="1" i="0">
-                <a:solidFill>
-                  <a:srgbClr val="FFFFFF"/>
-                </a:solidFill>
-                <a:latin typeface="Arial"/>
-              </a:rPr>
-              <a:t>Ministry 1</a:t>
-            </a:r>
-          </a:p>
-          <a:p>
-            <a:pPr>
-              <a:spcAft>
-                <a:spcPts val="700"/>
-              </a:spcAft>
-            </a:pPr>
-            <a:r>
-              <a:rPr sz="1300" b="0" i="0">
-                <a:solidFill>
-                  <a:srgbClr val="FFFFFF"/>
-                </a:solidFill>
-                <a:latin typeface="Arial"/>
-              </a:rPr>
-              <a:t>pays to build the identity system</a:t>
-            </a:r>
-          </a:p>
-        </p:txBody>
-      </p:sp>
-      <p:sp>
-        <p:nvSpPr>
-          <p:cNvPr id="6" name="Rounded Rectangle 5"/>
-          <p:cNvSpPr/>
-          <p:nvPr/>
-        </p:nvSpPr>
-        <p:spPr>
-          <a:xfrm>
-            <a:off x="3401568" y="1645920"/>
-            <a:ext cx="2606040" cy="1554480"/>
-          </a:xfrm>
-          <a:prstGeom prst="roundRect">
-            <a:avLst>
-              <a:gd name="adj" fmla="val 4500"/>
-            </a:avLst>
-          </a:prstGeom>
-          <a:solidFill>
-            <a:srgbClr val="E5F5FB"/>
-          </a:solidFill>
-          <a:ln>
-            <a:noFill/>
-          </a:ln>
-          <a:effectLst/>
-        </p:spPr>
-        <p:style>
-          <a:lnRef idx="1">
-            <a:schemeClr val="accent1"/>
-          </a:lnRef>
-          <a:fillRef idx="3">
-            <a:schemeClr val="accent1"/>
-          </a:fillRef>
-          <a:effectRef idx="2">
-            <a:schemeClr val="accent1"/>
-          </a:effectRef>
-          <a:fontRef idx="minor">
-            <a:schemeClr val="lt1"/>
-          </a:fontRef>
-        </p:style>
-        <p:txBody>
-          <a:bodyPr rtlCol="0" anchor="ctr"/>
-          <a:lstStyle/>
-          <a:p>
-            <a:pPr algn="ctr"/>
-          </a:p>
-        </p:txBody>
-      </p:sp>
-      <p:sp>
-        <p:nvSpPr>
-          <p:cNvPr id="7" name="TextBox 6"/>
-          <p:cNvSpPr txBox="1"/>
-          <p:nvPr/>
-        </p:nvSpPr>
-        <p:spPr>
-          <a:xfrm>
-            <a:off x="3566160" y="1792224"/>
-            <a:ext cx="2276856" cy="1280160"/>
-          </a:xfrm>
-          <a:prstGeom prst="rect">
-            <a:avLst/>
-          </a:prstGeom>
-          <a:noFill/>
-        </p:spPr>
-        <p:txBody>
-          <a:bodyPr wrap="square">
-            <a:spAutoFit/>
-          </a:bodyPr>
-          <a:lstStyle/>
-          <a:p>
-            <a:pPr>
-              <a:spcAft>
-                <a:spcPts val="700"/>
-              </a:spcAft>
-            </a:pPr>
-            <a:r>
-              <a:rPr sz="1600" b="1" i="0">
-                <a:solidFill>
-                  <a:srgbClr val="1A1A1A"/>
-                </a:solidFill>
-                <a:latin typeface="Arial"/>
-              </a:rPr>
-              <a:t>Ministry 2</a:t>
-            </a:r>
-          </a:p>
-          <a:p>
-            <a:pPr>
-              <a:spcAft>
-                <a:spcPts val="700"/>
-              </a:spcAft>
-            </a:pPr>
-            <a:r>
-              <a:rPr sz="1300" b="0" i="0">
+            <a:r>
+              <a:rPr sz="1700" b="0" i="1">
                 <a:solidFill>
                   <a:srgbClr val="595959"/>
                 </a:solidFill>
                 <a:latin typeface="Arial"/>
               </a:rPr>
-              <a:t>does not — it consumes the first</a:t>
-            </a:r>
-          </a:p>
-        </p:txBody>
-      </p:sp>
-      <p:sp>
-        <p:nvSpPr>
-          <p:cNvPr id="8" name="Rounded Rectangle 7"/>
-          <p:cNvSpPr/>
-          <p:nvPr/>
-        </p:nvSpPr>
-        <p:spPr>
-          <a:xfrm>
-            <a:off x="6144768" y="1645920"/>
-            <a:ext cx="2606040" cy="1554480"/>
-          </a:xfrm>
-          <a:prstGeom prst="roundRect">
-            <a:avLst>
-              <a:gd name="adj" fmla="val 4500"/>
-            </a:avLst>
-          </a:prstGeom>
-          <a:solidFill>
-            <a:srgbClr val="E5F5FB"/>
-          </a:solidFill>
-          <a:ln>
-            <a:noFill/>
-          </a:ln>
-          <a:effectLst/>
-        </p:spPr>
-        <p:style>
-          <a:lnRef idx="1">
-            <a:schemeClr val="accent1"/>
-          </a:lnRef>
-          <a:fillRef idx="3">
-            <a:schemeClr val="accent1"/>
-          </a:fillRef>
-          <a:effectRef idx="2">
-            <a:schemeClr val="accent1"/>
-          </a:effectRef>
-          <a:fontRef idx="minor">
-            <a:schemeClr val="lt1"/>
-          </a:fontRef>
-        </p:style>
-        <p:txBody>
-          <a:bodyPr rtlCol="0" anchor="ctr"/>
-          <a:lstStyle/>
-          <a:p>
-            <a:pPr algn="ctr"/>
-          </a:p>
-        </p:txBody>
-      </p:sp>
-      <p:sp>
-        <p:nvSpPr>
-          <p:cNvPr id="9" name="TextBox 8"/>
+              <a:t>Procurement rules can require interoperability. They cannot deliver it. Only planning at the level of the whole government, supported by reference architectures, can.</a:t>
+            </a:r>
+          </a:p>
+        </p:txBody>
+      </p:sp>
+      <p:sp>
+        <p:nvSpPr>
+          <p:cNvPr id="6" name="TextBox 5"/>
           <p:cNvSpPr txBox="1"/>
           <p:nvPr/>
         </p:nvSpPr>
         <p:spPr>
           <a:xfrm>
-            <a:off x="6309359" y="1792224"/>
-            <a:ext cx="2276856" cy="1280160"/>
+            <a:off x="822960" y="5989320"/>
+            <a:ext cx="7315200" cy="365760"/>
           </a:xfrm>
           <a:prstGeom prst="rect">
             <a:avLst/>
@@ -13425,238 +11776,14 @@
           </a:bodyPr>
           <a:lstStyle/>
           <a:p>
-            <a:pPr>
-              <a:spcAft>
-                <a:spcPts val="700"/>
-              </a:spcAft>
-            </a:pPr>
-            <a:r>
-              <a:rPr sz="1600" b="1" i="0">
-                <a:solidFill>
-                  <a:srgbClr val="1A1A1A"/>
-                </a:solidFill>
-                <a:latin typeface="Arial"/>
-              </a:rPr>
-              <a:t>Ministry 3</a:t>
-            </a:r>
-          </a:p>
-          <a:p>
-            <a:pPr>
-              <a:spcAft>
-                <a:spcPts val="700"/>
-              </a:spcAft>
-            </a:pPr>
-            <a:r>
-              <a:rPr sz="1300" b="0" i="0">
+            <a:r>
+              <a:rPr sz="1200" b="0" i="0">
                 <a:solidFill>
                   <a:srgbClr val="595959"/>
                 </a:solidFill>
                 <a:latin typeface="Arial"/>
               </a:rPr>
-              <a:t>does not — it consumes the same</a:t>
-            </a:r>
-          </a:p>
-        </p:txBody>
-      </p:sp>
-      <p:sp>
-        <p:nvSpPr>
-          <p:cNvPr id="10" name="Rounded Rectangle 9"/>
-          <p:cNvSpPr/>
-          <p:nvPr/>
-        </p:nvSpPr>
-        <p:spPr>
-          <a:xfrm>
-            <a:off x="8887968" y="1645920"/>
-            <a:ext cx="2606040" cy="1554480"/>
-          </a:xfrm>
-          <a:prstGeom prst="roundRect">
-            <a:avLst>
-              <a:gd name="adj" fmla="val 4500"/>
-            </a:avLst>
-          </a:prstGeom>
-          <a:solidFill>
-            <a:srgbClr val="E5F5FB"/>
-          </a:solidFill>
-          <a:ln>
-            <a:noFill/>
-          </a:ln>
-          <a:effectLst/>
-        </p:spPr>
-        <p:style>
-          <a:lnRef idx="1">
-            <a:schemeClr val="accent1"/>
-          </a:lnRef>
-          <a:fillRef idx="3">
-            <a:schemeClr val="accent1"/>
-          </a:fillRef>
-          <a:effectRef idx="2">
-            <a:schemeClr val="accent1"/>
-          </a:effectRef>
-          <a:fontRef idx="minor">
-            <a:schemeClr val="lt1"/>
-          </a:fontRef>
-        </p:style>
-        <p:txBody>
-          <a:bodyPr rtlCol="0" anchor="ctr"/>
-          <a:lstStyle/>
-          <a:p>
-            <a:pPr algn="ctr"/>
-          </a:p>
-        </p:txBody>
-      </p:sp>
-      <p:sp>
-        <p:nvSpPr>
-          <p:cNvPr id="11" name="TextBox 10"/>
-          <p:cNvSpPr txBox="1"/>
-          <p:nvPr/>
-        </p:nvSpPr>
-        <p:spPr>
-          <a:xfrm>
-            <a:off x="9052560" y="1792224"/>
-            <a:ext cx="2276856" cy="1280160"/>
-          </a:xfrm>
-          <a:prstGeom prst="rect">
-            <a:avLst/>
-          </a:prstGeom>
-          <a:noFill/>
-        </p:spPr>
-        <p:txBody>
-          <a:bodyPr wrap="square">
-            <a:spAutoFit/>
-          </a:bodyPr>
-          <a:lstStyle/>
-          <a:p>
-            <a:pPr>
-              <a:spcAft>
-                <a:spcPts val="700"/>
-              </a:spcAft>
-            </a:pPr>
-            <a:r>
-              <a:rPr sz="1600" b="1" i="0">
-                <a:solidFill>
-                  <a:srgbClr val="1A1A1A"/>
-                </a:solidFill>
-                <a:latin typeface="Arial"/>
-              </a:rPr>
-              <a:t>Ministry 4</a:t>
-            </a:r>
-          </a:p>
-          <a:p>
-            <a:pPr>
-              <a:spcAft>
-                <a:spcPts val="700"/>
-              </a:spcAft>
-            </a:pPr>
-            <a:r>
-              <a:rPr sz="1300" b="0" i="0">
-                <a:solidFill>
-                  <a:srgbClr val="595959"/>
-                </a:solidFill>
-                <a:latin typeface="Arial"/>
-              </a:rPr>
-              <a:t>does not — it consumes the same</a:t>
-            </a:r>
-          </a:p>
-        </p:txBody>
-      </p:sp>
-      <p:sp>
-        <p:nvSpPr>
-          <p:cNvPr id="12" name="TextBox 11"/>
-          <p:cNvSpPr txBox="1"/>
-          <p:nvPr/>
-        </p:nvSpPr>
-        <p:spPr>
-          <a:xfrm>
-            <a:off x="658368" y="3657600"/>
-            <a:ext cx="10789920" cy="1005840"/>
-          </a:xfrm>
-          <a:prstGeom prst="rect">
-            <a:avLst/>
-          </a:prstGeom>
-          <a:noFill/>
-        </p:spPr>
-        <p:txBody>
-          <a:bodyPr wrap="square">
-            <a:spAutoFit/>
-          </a:bodyPr>
-          <a:lstStyle/>
-          <a:p>
-            <a:r>
-              <a:rPr sz="2000" b="1" i="0">
-                <a:solidFill>
-                  <a:srgbClr val="1A1A1A"/>
-                </a:solidFill>
-                <a:latin typeface="Arial"/>
-              </a:rPr>
-              <a:t>Over five years, the country saves a meaningful share of its sectoral digital spend.</a:t>
-            </a:r>
-          </a:p>
-        </p:txBody>
-      </p:sp>
-      <p:sp>
-        <p:nvSpPr>
-          <p:cNvPr id="13" name="TextBox 12"/>
-          <p:cNvSpPr txBox="1"/>
-          <p:nvPr/>
-        </p:nvSpPr>
-        <p:spPr>
-          <a:xfrm>
-            <a:off x="658368" y="4709160"/>
-            <a:ext cx="10789920" cy="1463040"/>
-          </a:xfrm>
-          <a:prstGeom prst="rect">
-            <a:avLst/>
-          </a:prstGeom>
-          <a:noFill/>
-        </p:spPr>
-        <p:txBody>
-          <a:bodyPr wrap="square">
-            <a:spAutoFit/>
-          </a:bodyPr>
-          <a:lstStyle/>
-          <a:p>
-            <a:r>
-              <a:rPr sz="1600" b="0" i="0">
-                <a:solidFill>
-                  <a:srgbClr val="595959"/>
-                </a:solidFill>
-                <a:latin typeface="Arial"/>
-              </a:rPr>
-              <a:t>But this view does not exist inside any single project. It exists only at the level of your country’s whole digital portfolio — the view an EA gives you, and the view your minister needs to make funding decisions.</a:t>
-            </a:r>
-          </a:p>
-        </p:txBody>
-      </p:sp>
-      <p:sp>
-        <p:nvSpPr>
-          <p:cNvPr id="14" name="TextBox 13"/>
-          <p:cNvSpPr txBox="1"/>
-          <p:nvPr/>
-        </p:nvSpPr>
-        <p:spPr>
-          <a:xfrm>
-            <a:off x="457200" y="6473952"/>
-            <a:ext cx="7772400" cy="292608"/>
-          </a:xfrm>
-          <a:prstGeom prst="rect">
-            <a:avLst/>
-          </a:prstGeom>
-          <a:noFill/>
-        </p:spPr>
-        <p:txBody>
-          <a:bodyPr wrap="square">
-            <a:spAutoFit/>
-          </a:bodyPr>
-          <a:lstStyle/>
-          <a:p>
-            <a:r>
-              <a:rPr sz="900" b="0" i="0">
-                <a:solidFill>
-                  <a:srgbClr val="595959"/>
-                </a:solidFill>
-                <a:latin typeface="Arial"/>
-              </a:rPr>
-              <a:t>1.3 · Why projects can't do this themselves</a:t>
+              <a:t>standalone video · voice-over on text slides</a:t>
             </a:r>
           </a:p>
         </p:txBody>
@@ -13681,58 +11808,14 @@
       <p:grpSpPr/>
       <p:sp>
         <p:nvSpPr>
-          <p:cNvPr id="2" name="Rectangle 1"/>
-          <p:cNvSpPr/>
-          <p:nvPr/>
-        </p:nvSpPr>
-        <p:spPr>
-          <a:xfrm>
-            <a:off x="457200" y="384048"/>
-            <a:ext cx="45720" cy="256032"/>
-          </a:xfrm>
-          <a:prstGeom prst="rect">
-            <a:avLst/>
-          </a:prstGeom>
-          <a:solidFill>
-            <a:srgbClr val="009CD6"/>
-          </a:solidFill>
-          <a:ln>
-            <a:noFill/>
-          </a:ln>
-          <a:effectLst/>
-        </p:spPr>
-        <p:style>
-          <a:lnRef idx="1">
-            <a:schemeClr val="accent1"/>
-          </a:lnRef>
-          <a:fillRef idx="3">
-            <a:schemeClr val="accent1"/>
-          </a:fillRef>
-          <a:effectRef idx="2">
-            <a:schemeClr val="accent1"/>
-          </a:effectRef>
-          <a:fontRef idx="minor">
-            <a:schemeClr val="lt1"/>
-          </a:fontRef>
-        </p:style>
-        <p:txBody>
-          <a:bodyPr rtlCol="0" anchor="ctr"/>
-          <a:lstStyle/>
-          <a:p>
-            <a:pPr algn="ctr"/>
-          </a:p>
-        </p:txBody>
-      </p:sp>
-      <p:sp>
-        <p:nvSpPr>
-          <p:cNvPr id="3" name="TextBox 2"/>
+          <p:cNvPr id="2" name="TextBox 1"/>
           <p:cNvSpPr txBox="1"/>
           <p:nvPr/>
         </p:nvSpPr>
         <p:spPr>
           <a:xfrm>
-            <a:off x="621792" y="274320"/>
-            <a:ext cx="11247120" cy="914400"/>
+            <a:off x="1005840" y="1325880"/>
+            <a:ext cx="5486400" cy="365760"/>
           </a:xfrm>
           <a:prstGeom prst="rect">
             <a:avLst/>
@@ -13746,73 +11829,61 @@
           <a:lstStyle/>
           <a:p>
             <a:r>
-              <a:rPr sz="2800" b="1" i="0">
+              <a:rPr sz="1200" b="1" i="0">
+                <a:solidFill>
+                  <a:srgbClr val="006E96"/>
+                </a:solidFill>
+                <a:latin typeface="Arial"/>
+              </a:rPr>
+              <a:t>WHERE WE START</a:t>
+            </a:r>
+          </a:p>
+        </p:txBody>
+      </p:sp>
+      <p:sp>
+        <p:nvSpPr>
+          <p:cNvPr id="3" name="TextBox 2"/>
+          <p:cNvSpPr txBox="1"/>
+          <p:nvPr/>
+        </p:nvSpPr>
+        <p:spPr>
+          <a:xfrm>
+            <a:off x="1005840" y="1783080"/>
+            <a:ext cx="10149840" cy="1737360"/>
+          </a:xfrm>
+          <a:prstGeom prst="rect">
+            <a:avLst/>
+          </a:prstGeom>
+          <a:noFill/>
+        </p:spPr>
+        <p:txBody>
+          <a:bodyPr wrap="square">
+            <a:spAutoFit/>
+          </a:bodyPr>
+          <a:lstStyle/>
+          <a:p>
+            <a:r>
+              <a:rPr sz="3000" b="1" i="0">
                 <a:solidFill>
                   <a:srgbClr val="1A1A1A"/>
                 </a:solidFill>
                 <a:latin typeface="Arial"/>
               </a:rPr>
-              <a:t>Two more things projects cannot deliver</a:t>
-            </a:r>
-          </a:p>
-        </p:txBody>
-      </p:sp>
-      <p:sp>
-        <p:nvSpPr>
-          <p:cNvPr id="4" name="Rounded Rectangle 3"/>
-          <p:cNvSpPr/>
-          <p:nvPr/>
-        </p:nvSpPr>
-        <p:spPr>
-          <a:xfrm>
-            <a:off x="658368" y="1554480"/>
-            <a:ext cx="5394960" cy="4206240"/>
-          </a:xfrm>
-          <a:prstGeom prst="roundRect">
-            <a:avLst>
-              <a:gd name="adj" fmla="val 4500"/>
-            </a:avLst>
-          </a:prstGeom>
-          <a:solidFill>
-            <a:srgbClr val="E5F5FB"/>
-          </a:solidFill>
-          <a:ln>
-            <a:noFill/>
-          </a:ln>
-          <a:effectLst/>
-        </p:spPr>
-        <p:style>
-          <a:lnRef idx="1">
-            <a:schemeClr val="accent1"/>
-          </a:lnRef>
-          <a:fillRef idx="3">
-            <a:schemeClr val="accent1"/>
-          </a:fillRef>
-          <a:effectRef idx="2">
-            <a:schemeClr val="accent1"/>
-          </a:effectRef>
-          <a:fontRef idx="minor">
-            <a:schemeClr val="lt1"/>
-          </a:fontRef>
-        </p:style>
-        <p:txBody>
-          <a:bodyPr rtlCol="0" anchor="ctr"/>
-          <a:lstStyle/>
-          <a:p>
-            <a:pPr algn="ctr"/>
-          </a:p>
-        </p:txBody>
-      </p:sp>
-      <p:sp>
-        <p:nvSpPr>
-          <p:cNvPr id="5" name="TextBox 4"/>
+              <a:t>You already require interoperability. So why does the citizen still fill the form five times?</a:t>
+            </a:r>
+          </a:p>
+        </p:txBody>
+      </p:sp>
+      <p:sp>
+        <p:nvSpPr>
+          <p:cNvPr id="4" name="TextBox 3"/>
           <p:cNvSpPr txBox="1"/>
           <p:nvPr/>
         </p:nvSpPr>
         <p:spPr>
           <a:xfrm>
-            <a:off x="859536" y="1700784"/>
-            <a:ext cx="4992624" cy="3931920"/>
+            <a:off x="1005840" y="3611880"/>
+            <a:ext cx="10149840" cy="2377440"/>
           </a:xfrm>
           <a:prstGeom prst="rect">
             <a:avLst/>
@@ -13827,173 +11898,56 @@
           <a:p>
             <a:pPr>
               <a:spcAft>
-                <a:spcPts val="700"/>
+                <a:spcPts val="800"/>
               </a:spcAft>
             </a:pPr>
             <a:r>
-              <a:rPr sz="2000" b="1" i="0">
+              <a:rPr sz="1700" b="0" i="0">
                 <a:solidFill>
-                  <a:srgbClr val="006E96"/>
+                  <a:srgbClr val="595959"/>
                 </a:solidFill>
                 <a:latin typeface="Arial"/>
               </a:rPr>
-              <a:t>Sustainability</a:t>
+              <a:t>Every new project must specify open APIs. Every contract must require interoperability.</a:t>
             </a:r>
           </a:p>
           <a:p>
             <a:pPr>
               <a:spcAft>
-                <a:spcPts val="700"/>
+                <a:spcPts val="800"/>
               </a:spcAft>
             </a:pPr>
             <a:r>
-              <a:rPr sz="1600" b="0" i="0">
+              <a:rPr sz="1700" b="0" i="0">
                 <a:solidFill>
-                  <a:srgbClr val="1A1A1A"/>
+                  <a:srgbClr val="595959"/>
                 </a:solidFill>
                 <a:latin typeface="Arial"/>
               </a:rPr>
-              <a:t>Twelve years from now, the original vendor is gone. The open-source library has forked. The technology has moved on. The system is still in service — and nobody fully understands it.</a:t>
+              <a:t>Procurement rules can require behaviour.</a:t>
             </a:r>
           </a:p>
           <a:p>
             <a:pPr>
               <a:spcAft>
-                <a:spcPts val="700"/>
+                <a:spcPts val="800"/>
               </a:spcAft>
             </a:pPr>
             <a:r>
-              <a:rPr sz="1600" b="1" i="0">
+              <a:rPr sz="1700" b="0" i="0">
                 <a:solidFill>
-                  <a:srgbClr val="1A1A1A"/>
+                  <a:srgbClr val="595959"/>
                 </a:solidFill>
                 <a:latin typeface="Arial"/>
               </a:rPr>
-              <a:t>Projects are not incentivised to plan for that moment. They are incentivised to ship.</a:t>
-            </a:r>
-          </a:p>
-        </p:txBody>
-      </p:sp>
-      <p:sp>
-        <p:nvSpPr>
-          <p:cNvPr id="6" name="Rounded Rectangle 5"/>
-          <p:cNvSpPr/>
-          <p:nvPr/>
-        </p:nvSpPr>
-        <p:spPr>
-          <a:xfrm>
-            <a:off x="6281928" y="1554480"/>
-            <a:ext cx="5394960" cy="4206240"/>
-          </a:xfrm>
-          <a:prstGeom prst="roundRect">
-            <a:avLst>
-              <a:gd name="adj" fmla="val 4500"/>
-            </a:avLst>
-          </a:prstGeom>
-          <a:solidFill>
-            <a:srgbClr val="E5F5FB"/>
-          </a:solidFill>
-          <a:ln>
-            <a:noFill/>
-          </a:ln>
-          <a:effectLst/>
-        </p:spPr>
-        <p:style>
-          <a:lnRef idx="1">
-            <a:schemeClr val="accent1"/>
-          </a:lnRef>
-          <a:fillRef idx="3">
-            <a:schemeClr val="accent1"/>
-          </a:fillRef>
-          <a:effectRef idx="2">
-            <a:schemeClr val="accent1"/>
-          </a:effectRef>
-          <a:fontRef idx="minor">
-            <a:schemeClr val="lt1"/>
-          </a:fontRef>
-        </p:style>
-        <p:txBody>
-          <a:bodyPr rtlCol="0" anchor="ctr"/>
-          <a:lstStyle/>
-          <a:p>
-            <a:pPr algn="ctr"/>
-          </a:p>
-        </p:txBody>
-      </p:sp>
-      <p:sp>
-        <p:nvSpPr>
-          <p:cNvPr id="7" name="TextBox 6"/>
-          <p:cNvSpPr txBox="1"/>
-          <p:nvPr/>
-        </p:nvSpPr>
-        <p:spPr>
-          <a:xfrm>
-            <a:off x="6483096" y="1700784"/>
-            <a:ext cx="4992624" cy="3931920"/>
-          </a:xfrm>
-          <a:prstGeom prst="rect">
-            <a:avLst/>
-          </a:prstGeom>
-          <a:noFill/>
-        </p:spPr>
-        <p:txBody>
-          <a:bodyPr wrap="square">
-            <a:spAutoFit/>
-          </a:bodyPr>
-          <a:lstStyle/>
-          <a:p>
-            <a:pPr>
-              <a:spcAft>
-                <a:spcPts val="700"/>
-              </a:spcAft>
-            </a:pPr>
-            <a:r>
-              <a:rPr sz="2000" b="1" i="0">
-                <a:solidFill>
-                  <a:srgbClr val="006E96"/>
-                </a:solidFill>
-                <a:latin typeface="Arial"/>
-              </a:rPr>
-              <a:t>Complexity reduction</a:t>
-            </a:r>
-          </a:p>
-          <a:p>
-            <a:pPr>
-              <a:spcAft>
-                <a:spcPts val="700"/>
-              </a:spcAft>
-            </a:pPr>
-            <a:r>
-              <a:rPr sz="1600" b="0" i="0">
-                <a:solidFill>
-                  <a:srgbClr val="1A1A1A"/>
-                </a:solidFill>
-                <a:latin typeface="Arial"/>
-              </a:rPr>
-              <a:t>A project says yes to most feature requests, because requests come from people the project must please. Five years later, the system is too complex to maintain or change.</a:t>
-            </a:r>
-          </a:p>
-          <a:p>
-            <a:pPr>
-              <a:spcAft>
-                <a:spcPts val="700"/>
-              </a:spcAft>
-            </a:pPr>
-            <a:r>
-              <a:rPr sz="1600" b="1" i="0">
-                <a:solidFill>
-                  <a:srgbClr val="1A1A1A"/>
-                </a:solidFill>
-                <a:latin typeface="Arial"/>
-              </a:rPr>
-              <a:t>Saying no requires authority the project does not have.</a:t>
-            </a:r>
-          </a:p>
-        </p:txBody>
-      </p:sp>
-      <p:sp>
-        <p:nvSpPr>
-          <p:cNvPr id="8" name="TextBox 7"/>
+              <a:t>They cannot make it the cheapest choice.</a:t>
+            </a:r>
+          </a:p>
+        </p:txBody>
+      </p:sp>
+      <p:sp>
+        <p:nvSpPr>
+          <p:cNvPr id="5" name="TextBox 4"/>
           <p:cNvSpPr txBox="1"/>
           <p:nvPr/>
         </p:nvSpPr>
@@ -14021,6 +11975,41 @@
                 <a:latin typeface="Arial"/>
               </a:rPr>
               <a:t>1.3 · Why projects can't do this themselves</a:t>
+            </a:r>
+          </a:p>
+        </p:txBody>
+      </p:sp>
+      <p:sp>
+        <p:nvSpPr>
+          <p:cNvPr id="6" name="TextBox 5"/>
+          <p:cNvSpPr txBox="1"/>
+          <p:nvPr/>
+        </p:nvSpPr>
+        <p:spPr>
+          <a:xfrm>
+            <a:off x="10058400" y="6473952"/>
+            <a:ext cx="1673352" cy="292608"/>
+          </a:xfrm>
+          <a:prstGeom prst="rect">
+            <a:avLst/>
+          </a:prstGeom>
+          <a:noFill/>
+        </p:spPr>
+        <p:txBody>
+          <a:bodyPr wrap="square">
+            <a:spAutoFit/>
+          </a:bodyPr>
+          <a:lstStyle/>
+          <a:p>
+            <a:pPr algn="r"/>
+            <a:r>
+              <a:rPr sz="900" b="0" i="0">
+                <a:solidFill>
+                  <a:srgbClr val="595959"/>
+                </a:solidFill>
+                <a:latin typeface="Arial"/>
+              </a:rPr>
+              <a:t>www.itu.int</a:t>
             </a:r>
           </a:p>
         </p:txBody>
@@ -14116,7 +12105,7 @@
                 </a:solidFill>
                 <a:latin typeface="Arial"/>
               </a:rPr>
-              <a:t>A reference architecture is other countries' learning</a:t>
+              <a:t>Each project is rational — and builds its own</a:t>
             </a:r>
           </a:p>
         </p:txBody>
@@ -14149,13 +12138,29 @@
               </a:spcAft>
             </a:pPr>
             <a:r>
-              <a:rPr sz="2100" b="1" i="0">
+              <a:rPr sz="2000" b="1" i="0">
                 <a:solidFill>
                   <a:srgbClr val="1A1A1A"/>
                 </a:solidFill>
                 <a:latin typeface="Arial"/>
               </a:rPr>
-              <a:t>Other countries have built these systems for decades</a:t>
+              <a:t>The question every project asks</a:t>
+            </a:r>
+          </a:p>
+          <a:p>
+            <a:pPr>
+              <a:spcAft>
+                <a:spcPts val="300"/>
+              </a:spcAft>
+            </a:pPr>
+            <a:r>
+              <a:rPr sz="1600" b="0" i="0">
+                <a:solidFill>
+                  <a:srgbClr val="595959"/>
+                </a:solidFill>
+                <a:latin typeface="Arial"/>
+              </a:rPr>
+              <a:t>“How do we ship on time and on budget?”</a:t>
             </a:r>
           </a:p>
         </p:txBody>
@@ -14232,13 +12237,29 @@
               </a:spcAft>
             </a:pPr>
             <a:r>
-              <a:rPr sz="2100" b="1" i="0">
+              <a:rPr sz="2000" b="1" i="0">
                 <a:solidFill>
                   <a:srgbClr val="1A1A1A"/>
                 </a:solidFill>
                 <a:latin typeface="Arial"/>
               </a:rPr>
-              <a:t>They learned what survives technology change — and what cost them dearly</a:t>
+              <a:t>What re-use costs the project</a:t>
+            </a:r>
+          </a:p>
+          <a:p>
+            <a:pPr>
+              <a:spcAft>
+                <a:spcPts val="300"/>
+              </a:spcAft>
+            </a:pPr>
+            <a:r>
+              <a:rPr sz="1600" b="0" i="0">
+                <a:solidFill>
+                  <a:srgbClr val="595959"/>
+                </a:solidFill>
+                <a:latin typeface="Arial"/>
+              </a:rPr>
+              <a:t>Learn another ministry’s system. Negotiate with their team. Accept their delays.</a:t>
             </a:r>
           </a:p>
         </p:txBody>
@@ -14315,13 +12336,13 @@
               </a:spcAft>
             </a:pPr>
             <a:r>
-              <a:rPr sz="2100" b="1" i="0">
+              <a:rPr sz="2000" b="1" i="0">
                 <a:solidFill>
                   <a:srgbClr val="1A1A1A"/>
                 </a:solidFill>
                 <a:latin typeface="Arial"/>
               </a:rPr>
-              <a:t>A reference architecture is that learning, written down. PAERA is one such reference.</a:t>
+              <a:t>So the team builds its own — and that is not a failure of discipline</a:t>
             </a:r>
           </a:p>
           <a:p>
@@ -14337,7 +12358,7 @@
                 </a:solidFill>
                 <a:latin typeface="Arial"/>
               </a:rPr>
-              <a:t>Adopting it means starting with their lessons, instead of paying for the same lessons yourself over the next twenty years.</a:t>
+              <a:t>Building your own version is faster and simpler. The project is doing exactly what it was funded to do.</a:t>
             </a:r>
           </a:p>
         </p:txBody>
@@ -14396,6 +12417,1323 @@
       <p:grpSpPr/>
       <p:sp>
         <p:nvSpPr>
+          <p:cNvPr id="2" name="Rectangle 1"/>
+          <p:cNvSpPr/>
+          <p:nvPr/>
+        </p:nvSpPr>
+        <p:spPr>
+          <a:xfrm>
+            <a:off x="457200" y="384048"/>
+            <a:ext cx="45720" cy="256032"/>
+          </a:xfrm>
+          <a:prstGeom prst="rect">
+            <a:avLst/>
+          </a:prstGeom>
+          <a:solidFill>
+            <a:srgbClr val="009CD6"/>
+          </a:solidFill>
+          <a:ln>
+            <a:noFill/>
+          </a:ln>
+          <a:effectLst/>
+        </p:spPr>
+        <p:style>
+          <a:lnRef idx="1">
+            <a:schemeClr val="accent1"/>
+          </a:lnRef>
+          <a:fillRef idx="3">
+            <a:schemeClr val="accent1"/>
+          </a:fillRef>
+          <a:effectRef idx="2">
+            <a:schemeClr val="accent1"/>
+          </a:effectRef>
+          <a:fontRef idx="minor">
+            <a:schemeClr val="lt1"/>
+          </a:fontRef>
+        </p:style>
+        <p:txBody>
+          <a:bodyPr rtlCol="0" anchor="ctr"/>
+          <a:lstStyle/>
+          <a:p>
+            <a:pPr algn="ctr"/>
+          </a:p>
+        </p:txBody>
+      </p:sp>
+      <p:sp>
+        <p:nvSpPr>
+          <p:cNvPr id="3" name="TextBox 2"/>
+          <p:cNvSpPr txBox="1"/>
+          <p:nvPr/>
+        </p:nvSpPr>
+        <p:spPr>
+          <a:xfrm>
+            <a:off x="621792" y="274320"/>
+            <a:ext cx="11247120" cy="914400"/>
+          </a:xfrm>
+          <a:prstGeom prst="rect">
+            <a:avLst/>
+          </a:prstGeom>
+          <a:noFill/>
+        </p:spPr>
+        <p:txBody>
+          <a:bodyPr wrap="square">
+            <a:spAutoFit/>
+          </a:bodyPr>
+          <a:lstStyle/>
+          <a:p>
+            <a:r>
+              <a:rPr sz="2800" b="1" i="0">
+                <a:solidFill>
+                  <a:srgbClr val="1A1A1A"/>
+                </a:solidFill>
+                <a:latin typeface="Arial"/>
+              </a:rPr>
+              <a:t>The math changes only at whole-of-government level</a:t>
+            </a:r>
+          </a:p>
+        </p:txBody>
+      </p:sp>
+      <p:sp>
+        <p:nvSpPr>
+          <p:cNvPr id="4" name="Rounded Rectangle 3"/>
+          <p:cNvSpPr/>
+          <p:nvPr/>
+        </p:nvSpPr>
+        <p:spPr>
+          <a:xfrm>
+            <a:off x="658368" y="1645920"/>
+            <a:ext cx="2606040" cy="1554480"/>
+          </a:xfrm>
+          <a:prstGeom prst="roundRect">
+            <a:avLst>
+              <a:gd name="adj" fmla="val 4500"/>
+            </a:avLst>
+          </a:prstGeom>
+          <a:solidFill>
+            <a:srgbClr val="009CD6"/>
+          </a:solidFill>
+          <a:ln>
+            <a:noFill/>
+          </a:ln>
+          <a:effectLst/>
+        </p:spPr>
+        <p:style>
+          <a:lnRef idx="1">
+            <a:schemeClr val="accent1"/>
+          </a:lnRef>
+          <a:fillRef idx="3">
+            <a:schemeClr val="accent1"/>
+          </a:fillRef>
+          <a:effectRef idx="2">
+            <a:schemeClr val="accent1"/>
+          </a:effectRef>
+          <a:fontRef idx="minor">
+            <a:schemeClr val="lt1"/>
+          </a:fontRef>
+        </p:style>
+        <p:txBody>
+          <a:bodyPr rtlCol="0" anchor="ctr"/>
+          <a:lstStyle/>
+          <a:p>
+            <a:pPr algn="ctr"/>
+          </a:p>
+        </p:txBody>
+      </p:sp>
+      <p:sp>
+        <p:nvSpPr>
+          <p:cNvPr id="5" name="TextBox 4"/>
+          <p:cNvSpPr txBox="1"/>
+          <p:nvPr/>
+        </p:nvSpPr>
+        <p:spPr>
+          <a:xfrm>
+            <a:off x="822959" y="1792224"/>
+            <a:ext cx="2276856" cy="1280160"/>
+          </a:xfrm>
+          <a:prstGeom prst="rect">
+            <a:avLst/>
+          </a:prstGeom>
+          <a:noFill/>
+        </p:spPr>
+        <p:txBody>
+          <a:bodyPr wrap="square">
+            <a:spAutoFit/>
+          </a:bodyPr>
+          <a:lstStyle/>
+          <a:p>
+            <a:pPr>
+              <a:spcAft>
+                <a:spcPts val="700"/>
+              </a:spcAft>
+            </a:pPr>
+            <a:r>
+              <a:rPr sz="1600" b="1" i="0">
+                <a:solidFill>
+                  <a:srgbClr val="FFFFFF"/>
+                </a:solidFill>
+                <a:latin typeface="Arial"/>
+              </a:rPr>
+              <a:t>Ministry 1</a:t>
+            </a:r>
+          </a:p>
+          <a:p>
+            <a:pPr>
+              <a:spcAft>
+                <a:spcPts val="700"/>
+              </a:spcAft>
+            </a:pPr>
+            <a:r>
+              <a:rPr sz="1300" b="0" i="0">
+                <a:solidFill>
+                  <a:srgbClr val="FFFFFF"/>
+                </a:solidFill>
+                <a:latin typeface="Arial"/>
+              </a:rPr>
+              <a:t>pays to build the identity system</a:t>
+            </a:r>
+          </a:p>
+        </p:txBody>
+      </p:sp>
+      <p:sp>
+        <p:nvSpPr>
+          <p:cNvPr id="6" name="Rounded Rectangle 5"/>
+          <p:cNvSpPr/>
+          <p:nvPr/>
+        </p:nvSpPr>
+        <p:spPr>
+          <a:xfrm>
+            <a:off x="3401568" y="1645920"/>
+            <a:ext cx="2606040" cy="1554480"/>
+          </a:xfrm>
+          <a:prstGeom prst="roundRect">
+            <a:avLst>
+              <a:gd name="adj" fmla="val 4500"/>
+            </a:avLst>
+          </a:prstGeom>
+          <a:solidFill>
+            <a:srgbClr val="E5F5FB"/>
+          </a:solidFill>
+          <a:ln>
+            <a:noFill/>
+          </a:ln>
+          <a:effectLst/>
+        </p:spPr>
+        <p:style>
+          <a:lnRef idx="1">
+            <a:schemeClr val="accent1"/>
+          </a:lnRef>
+          <a:fillRef idx="3">
+            <a:schemeClr val="accent1"/>
+          </a:fillRef>
+          <a:effectRef idx="2">
+            <a:schemeClr val="accent1"/>
+          </a:effectRef>
+          <a:fontRef idx="minor">
+            <a:schemeClr val="lt1"/>
+          </a:fontRef>
+        </p:style>
+        <p:txBody>
+          <a:bodyPr rtlCol="0" anchor="ctr"/>
+          <a:lstStyle/>
+          <a:p>
+            <a:pPr algn="ctr"/>
+          </a:p>
+        </p:txBody>
+      </p:sp>
+      <p:sp>
+        <p:nvSpPr>
+          <p:cNvPr id="7" name="TextBox 6"/>
+          <p:cNvSpPr txBox="1"/>
+          <p:nvPr/>
+        </p:nvSpPr>
+        <p:spPr>
+          <a:xfrm>
+            <a:off x="3566160" y="1792224"/>
+            <a:ext cx="2276856" cy="1280160"/>
+          </a:xfrm>
+          <a:prstGeom prst="rect">
+            <a:avLst/>
+          </a:prstGeom>
+          <a:noFill/>
+        </p:spPr>
+        <p:txBody>
+          <a:bodyPr wrap="square">
+            <a:spAutoFit/>
+          </a:bodyPr>
+          <a:lstStyle/>
+          <a:p>
+            <a:pPr>
+              <a:spcAft>
+                <a:spcPts val="700"/>
+              </a:spcAft>
+            </a:pPr>
+            <a:r>
+              <a:rPr sz="1600" b="1" i="0">
+                <a:solidFill>
+                  <a:srgbClr val="1A1A1A"/>
+                </a:solidFill>
+                <a:latin typeface="Arial"/>
+              </a:rPr>
+              <a:t>Ministry 2</a:t>
+            </a:r>
+          </a:p>
+          <a:p>
+            <a:pPr>
+              <a:spcAft>
+                <a:spcPts val="700"/>
+              </a:spcAft>
+            </a:pPr>
+            <a:r>
+              <a:rPr sz="1300" b="0" i="0">
+                <a:solidFill>
+                  <a:srgbClr val="595959"/>
+                </a:solidFill>
+                <a:latin typeface="Arial"/>
+              </a:rPr>
+              <a:t>does not — it consumes the first</a:t>
+            </a:r>
+          </a:p>
+        </p:txBody>
+      </p:sp>
+      <p:sp>
+        <p:nvSpPr>
+          <p:cNvPr id="8" name="Rounded Rectangle 7"/>
+          <p:cNvSpPr/>
+          <p:nvPr/>
+        </p:nvSpPr>
+        <p:spPr>
+          <a:xfrm>
+            <a:off x="6144768" y="1645920"/>
+            <a:ext cx="2606040" cy="1554480"/>
+          </a:xfrm>
+          <a:prstGeom prst="roundRect">
+            <a:avLst>
+              <a:gd name="adj" fmla="val 4500"/>
+            </a:avLst>
+          </a:prstGeom>
+          <a:solidFill>
+            <a:srgbClr val="E5F5FB"/>
+          </a:solidFill>
+          <a:ln>
+            <a:noFill/>
+          </a:ln>
+          <a:effectLst/>
+        </p:spPr>
+        <p:style>
+          <a:lnRef idx="1">
+            <a:schemeClr val="accent1"/>
+          </a:lnRef>
+          <a:fillRef idx="3">
+            <a:schemeClr val="accent1"/>
+          </a:fillRef>
+          <a:effectRef idx="2">
+            <a:schemeClr val="accent1"/>
+          </a:effectRef>
+          <a:fontRef idx="minor">
+            <a:schemeClr val="lt1"/>
+          </a:fontRef>
+        </p:style>
+        <p:txBody>
+          <a:bodyPr rtlCol="0" anchor="ctr"/>
+          <a:lstStyle/>
+          <a:p>
+            <a:pPr algn="ctr"/>
+          </a:p>
+        </p:txBody>
+      </p:sp>
+      <p:sp>
+        <p:nvSpPr>
+          <p:cNvPr id="9" name="TextBox 8"/>
+          <p:cNvSpPr txBox="1"/>
+          <p:nvPr/>
+        </p:nvSpPr>
+        <p:spPr>
+          <a:xfrm>
+            <a:off x="6309359" y="1792224"/>
+            <a:ext cx="2276856" cy="1280160"/>
+          </a:xfrm>
+          <a:prstGeom prst="rect">
+            <a:avLst/>
+          </a:prstGeom>
+          <a:noFill/>
+        </p:spPr>
+        <p:txBody>
+          <a:bodyPr wrap="square">
+            <a:spAutoFit/>
+          </a:bodyPr>
+          <a:lstStyle/>
+          <a:p>
+            <a:pPr>
+              <a:spcAft>
+                <a:spcPts val="700"/>
+              </a:spcAft>
+            </a:pPr>
+            <a:r>
+              <a:rPr sz="1600" b="1" i="0">
+                <a:solidFill>
+                  <a:srgbClr val="1A1A1A"/>
+                </a:solidFill>
+                <a:latin typeface="Arial"/>
+              </a:rPr>
+              <a:t>Ministry 3</a:t>
+            </a:r>
+          </a:p>
+          <a:p>
+            <a:pPr>
+              <a:spcAft>
+                <a:spcPts val="700"/>
+              </a:spcAft>
+            </a:pPr>
+            <a:r>
+              <a:rPr sz="1300" b="0" i="0">
+                <a:solidFill>
+                  <a:srgbClr val="595959"/>
+                </a:solidFill>
+                <a:latin typeface="Arial"/>
+              </a:rPr>
+              <a:t>does not — it consumes the same</a:t>
+            </a:r>
+          </a:p>
+        </p:txBody>
+      </p:sp>
+      <p:sp>
+        <p:nvSpPr>
+          <p:cNvPr id="10" name="Rounded Rectangle 9"/>
+          <p:cNvSpPr/>
+          <p:nvPr/>
+        </p:nvSpPr>
+        <p:spPr>
+          <a:xfrm>
+            <a:off x="8887968" y="1645920"/>
+            <a:ext cx="2606040" cy="1554480"/>
+          </a:xfrm>
+          <a:prstGeom prst="roundRect">
+            <a:avLst>
+              <a:gd name="adj" fmla="val 4500"/>
+            </a:avLst>
+          </a:prstGeom>
+          <a:solidFill>
+            <a:srgbClr val="E5F5FB"/>
+          </a:solidFill>
+          <a:ln>
+            <a:noFill/>
+          </a:ln>
+          <a:effectLst/>
+        </p:spPr>
+        <p:style>
+          <a:lnRef idx="1">
+            <a:schemeClr val="accent1"/>
+          </a:lnRef>
+          <a:fillRef idx="3">
+            <a:schemeClr val="accent1"/>
+          </a:fillRef>
+          <a:effectRef idx="2">
+            <a:schemeClr val="accent1"/>
+          </a:effectRef>
+          <a:fontRef idx="minor">
+            <a:schemeClr val="lt1"/>
+          </a:fontRef>
+        </p:style>
+        <p:txBody>
+          <a:bodyPr rtlCol="0" anchor="ctr"/>
+          <a:lstStyle/>
+          <a:p>
+            <a:pPr algn="ctr"/>
+          </a:p>
+        </p:txBody>
+      </p:sp>
+      <p:sp>
+        <p:nvSpPr>
+          <p:cNvPr id="11" name="TextBox 10"/>
+          <p:cNvSpPr txBox="1"/>
+          <p:nvPr/>
+        </p:nvSpPr>
+        <p:spPr>
+          <a:xfrm>
+            <a:off x="9052560" y="1792224"/>
+            <a:ext cx="2276856" cy="1280160"/>
+          </a:xfrm>
+          <a:prstGeom prst="rect">
+            <a:avLst/>
+          </a:prstGeom>
+          <a:noFill/>
+        </p:spPr>
+        <p:txBody>
+          <a:bodyPr wrap="square">
+            <a:spAutoFit/>
+          </a:bodyPr>
+          <a:lstStyle/>
+          <a:p>
+            <a:pPr>
+              <a:spcAft>
+                <a:spcPts val="700"/>
+              </a:spcAft>
+            </a:pPr>
+            <a:r>
+              <a:rPr sz="1600" b="1" i="0">
+                <a:solidFill>
+                  <a:srgbClr val="1A1A1A"/>
+                </a:solidFill>
+                <a:latin typeface="Arial"/>
+              </a:rPr>
+              <a:t>Ministry 4</a:t>
+            </a:r>
+          </a:p>
+          <a:p>
+            <a:pPr>
+              <a:spcAft>
+                <a:spcPts val="700"/>
+              </a:spcAft>
+            </a:pPr>
+            <a:r>
+              <a:rPr sz="1300" b="0" i="0">
+                <a:solidFill>
+                  <a:srgbClr val="595959"/>
+                </a:solidFill>
+                <a:latin typeface="Arial"/>
+              </a:rPr>
+              <a:t>does not — it consumes the same</a:t>
+            </a:r>
+          </a:p>
+        </p:txBody>
+      </p:sp>
+      <p:sp>
+        <p:nvSpPr>
+          <p:cNvPr id="12" name="TextBox 11"/>
+          <p:cNvSpPr txBox="1"/>
+          <p:nvPr/>
+        </p:nvSpPr>
+        <p:spPr>
+          <a:xfrm>
+            <a:off x="658368" y="3657600"/>
+            <a:ext cx="10789920" cy="1005840"/>
+          </a:xfrm>
+          <a:prstGeom prst="rect">
+            <a:avLst/>
+          </a:prstGeom>
+          <a:noFill/>
+        </p:spPr>
+        <p:txBody>
+          <a:bodyPr wrap="square">
+            <a:spAutoFit/>
+          </a:bodyPr>
+          <a:lstStyle/>
+          <a:p>
+            <a:r>
+              <a:rPr sz="2000" b="1" i="0">
+                <a:solidFill>
+                  <a:srgbClr val="1A1A1A"/>
+                </a:solidFill>
+                <a:latin typeface="Arial"/>
+              </a:rPr>
+              <a:t>Over five years, the country saves a meaningful share of its sectoral digital spend.</a:t>
+            </a:r>
+          </a:p>
+        </p:txBody>
+      </p:sp>
+      <p:sp>
+        <p:nvSpPr>
+          <p:cNvPr id="13" name="TextBox 12"/>
+          <p:cNvSpPr txBox="1"/>
+          <p:nvPr/>
+        </p:nvSpPr>
+        <p:spPr>
+          <a:xfrm>
+            <a:off x="658368" y="4709160"/>
+            <a:ext cx="10789920" cy="1463040"/>
+          </a:xfrm>
+          <a:prstGeom prst="rect">
+            <a:avLst/>
+          </a:prstGeom>
+          <a:noFill/>
+        </p:spPr>
+        <p:txBody>
+          <a:bodyPr wrap="square">
+            <a:spAutoFit/>
+          </a:bodyPr>
+          <a:lstStyle/>
+          <a:p>
+            <a:r>
+              <a:rPr sz="1600" b="0" i="0">
+                <a:solidFill>
+                  <a:srgbClr val="595959"/>
+                </a:solidFill>
+                <a:latin typeface="Arial"/>
+              </a:rPr>
+              <a:t>But this view does not exist inside any single project. It exists only at the level of your country’s whole digital portfolio — the view an EA gives you, and the view your minister needs to make funding decisions.</a:t>
+            </a:r>
+          </a:p>
+        </p:txBody>
+      </p:sp>
+      <p:sp>
+        <p:nvSpPr>
+          <p:cNvPr id="14" name="TextBox 13"/>
+          <p:cNvSpPr txBox="1"/>
+          <p:nvPr/>
+        </p:nvSpPr>
+        <p:spPr>
+          <a:xfrm>
+            <a:off x="457200" y="6473952"/>
+            <a:ext cx="7772400" cy="292608"/>
+          </a:xfrm>
+          <a:prstGeom prst="rect">
+            <a:avLst/>
+          </a:prstGeom>
+          <a:noFill/>
+        </p:spPr>
+        <p:txBody>
+          <a:bodyPr wrap="square">
+            <a:spAutoFit/>
+          </a:bodyPr>
+          <a:lstStyle/>
+          <a:p>
+            <a:r>
+              <a:rPr sz="900" b="0" i="0">
+                <a:solidFill>
+                  <a:srgbClr val="595959"/>
+                </a:solidFill>
+                <a:latin typeface="Arial"/>
+              </a:rPr>
+              <a:t>1.3 · Why projects can't do this themselves</a:t>
+            </a:r>
+          </a:p>
+        </p:txBody>
+      </p:sp>
+    </p:spTree>
+  </p:cSld>
+  <p:clrMapOvr>
+    <a:masterClrMapping/>
+  </p:clrMapOvr>
+</p:sld>
+</file>
+
+<file path=ppt/slides/slide21.xml><?xml version="1.0" encoding="utf-8"?>
+<p:sld xmlns:a="http://schemas.openxmlformats.org/drawingml/2006/main" xmlns:p="http://schemas.openxmlformats.org/presentationml/2006/main" xmlns:r="http://schemas.openxmlformats.org/officeDocument/2006/relationships">
+  <p:cSld>
+    <p:spTree>
+      <p:nvGrpSpPr>
+        <p:cNvPr id="1" name=""/>
+        <p:cNvGrpSpPr/>
+        <p:nvPr/>
+      </p:nvGrpSpPr>
+      <p:grpSpPr/>
+      <p:sp>
+        <p:nvSpPr>
+          <p:cNvPr id="2" name="Rectangle 1"/>
+          <p:cNvSpPr/>
+          <p:nvPr/>
+        </p:nvSpPr>
+        <p:spPr>
+          <a:xfrm>
+            <a:off x="457200" y="384048"/>
+            <a:ext cx="45720" cy="256032"/>
+          </a:xfrm>
+          <a:prstGeom prst="rect">
+            <a:avLst/>
+          </a:prstGeom>
+          <a:solidFill>
+            <a:srgbClr val="009CD6"/>
+          </a:solidFill>
+          <a:ln>
+            <a:noFill/>
+          </a:ln>
+          <a:effectLst/>
+        </p:spPr>
+        <p:style>
+          <a:lnRef idx="1">
+            <a:schemeClr val="accent1"/>
+          </a:lnRef>
+          <a:fillRef idx="3">
+            <a:schemeClr val="accent1"/>
+          </a:fillRef>
+          <a:effectRef idx="2">
+            <a:schemeClr val="accent1"/>
+          </a:effectRef>
+          <a:fontRef idx="minor">
+            <a:schemeClr val="lt1"/>
+          </a:fontRef>
+        </p:style>
+        <p:txBody>
+          <a:bodyPr rtlCol="0" anchor="ctr"/>
+          <a:lstStyle/>
+          <a:p>
+            <a:pPr algn="ctr"/>
+          </a:p>
+        </p:txBody>
+      </p:sp>
+      <p:sp>
+        <p:nvSpPr>
+          <p:cNvPr id="3" name="TextBox 2"/>
+          <p:cNvSpPr txBox="1"/>
+          <p:nvPr/>
+        </p:nvSpPr>
+        <p:spPr>
+          <a:xfrm>
+            <a:off x="621792" y="274320"/>
+            <a:ext cx="11247120" cy="914400"/>
+          </a:xfrm>
+          <a:prstGeom prst="rect">
+            <a:avLst/>
+          </a:prstGeom>
+          <a:noFill/>
+        </p:spPr>
+        <p:txBody>
+          <a:bodyPr wrap="square">
+            <a:spAutoFit/>
+          </a:bodyPr>
+          <a:lstStyle/>
+          <a:p>
+            <a:r>
+              <a:rPr sz="2800" b="1" i="0">
+                <a:solidFill>
+                  <a:srgbClr val="1A1A1A"/>
+                </a:solidFill>
+                <a:latin typeface="Arial"/>
+              </a:rPr>
+              <a:t>Two more things projects cannot deliver</a:t>
+            </a:r>
+          </a:p>
+        </p:txBody>
+      </p:sp>
+      <p:sp>
+        <p:nvSpPr>
+          <p:cNvPr id="4" name="Rounded Rectangle 3"/>
+          <p:cNvSpPr/>
+          <p:nvPr/>
+        </p:nvSpPr>
+        <p:spPr>
+          <a:xfrm>
+            <a:off x="658368" y="1554480"/>
+            <a:ext cx="5394960" cy="4206240"/>
+          </a:xfrm>
+          <a:prstGeom prst="roundRect">
+            <a:avLst>
+              <a:gd name="adj" fmla="val 4500"/>
+            </a:avLst>
+          </a:prstGeom>
+          <a:solidFill>
+            <a:srgbClr val="E5F5FB"/>
+          </a:solidFill>
+          <a:ln>
+            <a:noFill/>
+          </a:ln>
+          <a:effectLst/>
+        </p:spPr>
+        <p:style>
+          <a:lnRef idx="1">
+            <a:schemeClr val="accent1"/>
+          </a:lnRef>
+          <a:fillRef idx="3">
+            <a:schemeClr val="accent1"/>
+          </a:fillRef>
+          <a:effectRef idx="2">
+            <a:schemeClr val="accent1"/>
+          </a:effectRef>
+          <a:fontRef idx="minor">
+            <a:schemeClr val="lt1"/>
+          </a:fontRef>
+        </p:style>
+        <p:txBody>
+          <a:bodyPr rtlCol="0" anchor="ctr"/>
+          <a:lstStyle/>
+          <a:p>
+            <a:pPr algn="ctr"/>
+          </a:p>
+        </p:txBody>
+      </p:sp>
+      <p:sp>
+        <p:nvSpPr>
+          <p:cNvPr id="5" name="TextBox 4"/>
+          <p:cNvSpPr txBox="1"/>
+          <p:nvPr/>
+        </p:nvSpPr>
+        <p:spPr>
+          <a:xfrm>
+            <a:off x="859536" y="1700784"/>
+            <a:ext cx="4992624" cy="3931920"/>
+          </a:xfrm>
+          <a:prstGeom prst="rect">
+            <a:avLst/>
+          </a:prstGeom>
+          <a:noFill/>
+        </p:spPr>
+        <p:txBody>
+          <a:bodyPr wrap="square">
+            <a:spAutoFit/>
+          </a:bodyPr>
+          <a:lstStyle/>
+          <a:p>
+            <a:pPr>
+              <a:spcAft>
+                <a:spcPts val="700"/>
+              </a:spcAft>
+            </a:pPr>
+            <a:r>
+              <a:rPr sz="2000" b="1" i="0">
+                <a:solidFill>
+                  <a:srgbClr val="006E96"/>
+                </a:solidFill>
+                <a:latin typeface="Arial"/>
+              </a:rPr>
+              <a:t>Sustainability</a:t>
+            </a:r>
+          </a:p>
+          <a:p>
+            <a:pPr>
+              <a:spcAft>
+                <a:spcPts val="700"/>
+              </a:spcAft>
+            </a:pPr>
+            <a:r>
+              <a:rPr sz="1600" b="0" i="0">
+                <a:solidFill>
+                  <a:srgbClr val="1A1A1A"/>
+                </a:solidFill>
+                <a:latin typeface="Arial"/>
+              </a:rPr>
+              <a:t>Twelve years from now, the original vendor is gone. The open-source library has forked. The technology has moved on. The system is still in service — and nobody fully understands it.</a:t>
+            </a:r>
+          </a:p>
+          <a:p>
+            <a:pPr>
+              <a:spcAft>
+                <a:spcPts val="700"/>
+              </a:spcAft>
+            </a:pPr>
+            <a:r>
+              <a:rPr sz="1600" b="1" i="0">
+                <a:solidFill>
+                  <a:srgbClr val="1A1A1A"/>
+                </a:solidFill>
+                <a:latin typeface="Arial"/>
+              </a:rPr>
+              <a:t>Projects are not incentivised to plan for that moment. They are incentivised to ship.</a:t>
+            </a:r>
+          </a:p>
+        </p:txBody>
+      </p:sp>
+      <p:sp>
+        <p:nvSpPr>
+          <p:cNvPr id="6" name="Rounded Rectangle 5"/>
+          <p:cNvSpPr/>
+          <p:nvPr/>
+        </p:nvSpPr>
+        <p:spPr>
+          <a:xfrm>
+            <a:off x="6281928" y="1554480"/>
+            <a:ext cx="5394960" cy="4206240"/>
+          </a:xfrm>
+          <a:prstGeom prst="roundRect">
+            <a:avLst>
+              <a:gd name="adj" fmla="val 4500"/>
+            </a:avLst>
+          </a:prstGeom>
+          <a:solidFill>
+            <a:srgbClr val="E5F5FB"/>
+          </a:solidFill>
+          <a:ln>
+            <a:noFill/>
+          </a:ln>
+          <a:effectLst/>
+        </p:spPr>
+        <p:style>
+          <a:lnRef idx="1">
+            <a:schemeClr val="accent1"/>
+          </a:lnRef>
+          <a:fillRef idx="3">
+            <a:schemeClr val="accent1"/>
+          </a:fillRef>
+          <a:effectRef idx="2">
+            <a:schemeClr val="accent1"/>
+          </a:effectRef>
+          <a:fontRef idx="minor">
+            <a:schemeClr val="lt1"/>
+          </a:fontRef>
+        </p:style>
+        <p:txBody>
+          <a:bodyPr rtlCol="0" anchor="ctr"/>
+          <a:lstStyle/>
+          <a:p>
+            <a:pPr algn="ctr"/>
+          </a:p>
+        </p:txBody>
+      </p:sp>
+      <p:sp>
+        <p:nvSpPr>
+          <p:cNvPr id="7" name="TextBox 6"/>
+          <p:cNvSpPr txBox="1"/>
+          <p:nvPr/>
+        </p:nvSpPr>
+        <p:spPr>
+          <a:xfrm>
+            <a:off x="6483096" y="1700784"/>
+            <a:ext cx="4992624" cy="3931920"/>
+          </a:xfrm>
+          <a:prstGeom prst="rect">
+            <a:avLst/>
+          </a:prstGeom>
+          <a:noFill/>
+        </p:spPr>
+        <p:txBody>
+          <a:bodyPr wrap="square">
+            <a:spAutoFit/>
+          </a:bodyPr>
+          <a:lstStyle/>
+          <a:p>
+            <a:pPr>
+              <a:spcAft>
+                <a:spcPts val="700"/>
+              </a:spcAft>
+            </a:pPr>
+            <a:r>
+              <a:rPr sz="2000" b="1" i="0">
+                <a:solidFill>
+                  <a:srgbClr val="006E96"/>
+                </a:solidFill>
+                <a:latin typeface="Arial"/>
+              </a:rPr>
+              <a:t>Complexity reduction</a:t>
+            </a:r>
+          </a:p>
+          <a:p>
+            <a:pPr>
+              <a:spcAft>
+                <a:spcPts val="700"/>
+              </a:spcAft>
+            </a:pPr>
+            <a:r>
+              <a:rPr sz="1600" b="0" i="0">
+                <a:solidFill>
+                  <a:srgbClr val="1A1A1A"/>
+                </a:solidFill>
+                <a:latin typeface="Arial"/>
+              </a:rPr>
+              <a:t>A project says yes to most feature requests, because requests come from people the project must please. Five years later, the system is too complex to maintain or change.</a:t>
+            </a:r>
+          </a:p>
+          <a:p>
+            <a:pPr>
+              <a:spcAft>
+                <a:spcPts val="700"/>
+              </a:spcAft>
+            </a:pPr>
+            <a:r>
+              <a:rPr sz="1600" b="1" i="0">
+                <a:solidFill>
+                  <a:srgbClr val="1A1A1A"/>
+                </a:solidFill>
+                <a:latin typeface="Arial"/>
+              </a:rPr>
+              <a:t>Saying no requires authority the project does not have.</a:t>
+            </a:r>
+          </a:p>
+        </p:txBody>
+      </p:sp>
+      <p:sp>
+        <p:nvSpPr>
+          <p:cNvPr id="8" name="TextBox 7"/>
+          <p:cNvSpPr txBox="1"/>
+          <p:nvPr/>
+        </p:nvSpPr>
+        <p:spPr>
+          <a:xfrm>
+            <a:off x="457200" y="6473952"/>
+            <a:ext cx="7772400" cy="292608"/>
+          </a:xfrm>
+          <a:prstGeom prst="rect">
+            <a:avLst/>
+          </a:prstGeom>
+          <a:noFill/>
+        </p:spPr>
+        <p:txBody>
+          <a:bodyPr wrap="square">
+            <a:spAutoFit/>
+          </a:bodyPr>
+          <a:lstStyle/>
+          <a:p>
+            <a:r>
+              <a:rPr sz="900" b="0" i="0">
+                <a:solidFill>
+                  <a:srgbClr val="595959"/>
+                </a:solidFill>
+                <a:latin typeface="Arial"/>
+              </a:rPr>
+              <a:t>1.3 · Why projects can't do this themselves</a:t>
+            </a:r>
+          </a:p>
+        </p:txBody>
+      </p:sp>
+    </p:spTree>
+  </p:cSld>
+  <p:clrMapOvr>
+    <a:masterClrMapping/>
+  </p:clrMapOvr>
+</p:sld>
+</file>
+
+<file path=ppt/slides/slide22.xml><?xml version="1.0" encoding="utf-8"?>
+<p:sld xmlns:a="http://schemas.openxmlformats.org/drawingml/2006/main" xmlns:p="http://schemas.openxmlformats.org/presentationml/2006/main" xmlns:r="http://schemas.openxmlformats.org/officeDocument/2006/relationships">
+  <p:cSld>
+    <p:spTree>
+      <p:nvGrpSpPr>
+        <p:cNvPr id="1" name=""/>
+        <p:cNvGrpSpPr/>
+        <p:nvPr/>
+      </p:nvGrpSpPr>
+      <p:grpSpPr/>
+      <p:sp>
+        <p:nvSpPr>
+          <p:cNvPr id="2" name="Rectangle 1"/>
+          <p:cNvSpPr/>
+          <p:nvPr/>
+        </p:nvSpPr>
+        <p:spPr>
+          <a:xfrm>
+            <a:off x="457200" y="384048"/>
+            <a:ext cx="45720" cy="256032"/>
+          </a:xfrm>
+          <a:prstGeom prst="rect">
+            <a:avLst/>
+          </a:prstGeom>
+          <a:solidFill>
+            <a:srgbClr val="009CD6"/>
+          </a:solidFill>
+          <a:ln>
+            <a:noFill/>
+          </a:ln>
+          <a:effectLst/>
+        </p:spPr>
+        <p:style>
+          <a:lnRef idx="1">
+            <a:schemeClr val="accent1"/>
+          </a:lnRef>
+          <a:fillRef idx="3">
+            <a:schemeClr val="accent1"/>
+          </a:fillRef>
+          <a:effectRef idx="2">
+            <a:schemeClr val="accent1"/>
+          </a:effectRef>
+          <a:fontRef idx="minor">
+            <a:schemeClr val="lt1"/>
+          </a:fontRef>
+        </p:style>
+        <p:txBody>
+          <a:bodyPr rtlCol="0" anchor="ctr"/>
+          <a:lstStyle/>
+          <a:p>
+            <a:pPr algn="ctr"/>
+          </a:p>
+        </p:txBody>
+      </p:sp>
+      <p:sp>
+        <p:nvSpPr>
+          <p:cNvPr id="3" name="TextBox 2"/>
+          <p:cNvSpPr txBox="1"/>
+          <p:nvPr/>
+        </p:nvSpPr>
+        <p:spPr>
+          <a:xfrm>
+            <a:off x="621792" y="274320"/>
+            <a:ext cx="11247120" cy="914400"/>
+          </a:xfrm>
+          <a:prstGeom prst="rect">
+            <a:avLst/>
+          </a:prstGeom>
+          <a:noFill/>
+        </p:spPr>
+        <p:txBody>
+          <a:bodyPr wrap="square">
+            <a:spAutoFit/>
+          </a:bodyPr>
+          <a:lstStyle/>
+          <a:p>
+            <a:r>
+              <a:rPr sz="2800" b="1" i="0">
+                <a:solidFill>
+                  <a:srgbClr val="1A1A1A"/>
+                </a:solidFill>
+                <a:latin typeface="Arial"/>
+              </a:rPr>
+              <a:t>A reference architecture is other countries' learning</a:t>
+            </a:r>
+          </a:p>
+        </p:txBody>
+      </p:sp>
+      <p:sp>
+        <p:nvSpPr>
+          <p:cNvPr id="4" name="TextBox 3"/>
+          <p:cNvSpPr txBox="1"/>
+          <p:nvPr/>
+        </p:nvSpPr>
+        <p:spPr>
+          <a:xfrm>
+            <a:off x="658368" y="1417320"/>
+            <a:ext cx="10984687" cy="1569720"/>
+          </a:xfrm>
+          <a:prstGeom prst="rect">
+            <a:avLst/>
+          </a:prstGeom>
+          <a:noFill/>
+        </p:spPr>
+        <p:txBody>
+          <a:bodyPr wrap="square">
+            <a:spAutoFit/>
+          </a:bodyPr>
+          <a:lstStyle/>
+          <a:p>
+            <a:pPr>
+              <a:spcAft>
+                <a:spcPts val="300"/>
+              </a:spcAft>
+            </a:pPr>
+            <a:r>
+              <a:rPr sz="2100" b="1" i="0">
+                <a:solidFill>
+                  <a:srgbClr val="1A1A1A"/>
+                </a:solidFill>
+                <a:latin typeface="Arial"/>
+              </a:rPr>
+              <a:t>Other countries have built these systems for decades</a:t>
+            </a:r>
+          </a:p>
+        </p:txBody>
+      </p:sp>
+      <p:sp>
+        <p:nvSpPr>
+          <p:cNvPr id="5" name="Rectangle 4"/>
+          <p:cNvSpPr/>
+          <p:nvPr/>
+        </p:nvSpPr>
+        <p:spPr>
+          <a:xfrm>
+            <a:off x="621792" y="2991612"/>
+            <a:ext cx="10881360" cy="12700"/>
+          </a:xfrm>
+          <a:prstGeom prst="rect">
+            <a:avLst/>
+          </a:prstGeom>
+          <a:solidFill>
+            <a:srgbClr val="DDECF4"/>
+          </a:solidFill>
+          <a:ln>
+            <a:noFill/>
+          </a:ln>
+          <a:effectLst/>
+        </p:spPr>
+        <p:style>
+          <a:lnRef idx="1">
+            <a:schemeClr val="accent1"/>
+          </a:lnRef>
+          <a:fillRef idx="3">
+            <a:schemeClr val="accent1"/>
+          </a:fillRef>
+          <a:effectRef idx="2">
+            <a:schemeClr val="accent1"/>
+          </a:effectRef>
+          <a:fontRef idx="minor">
+            <a:schemeClr val="lt1"/>
+          </a:fontRef>
+        </p:style>
+        <p:txBody>
+          <a:bodyPr rtlCol="0" anchor="ctr"/>
+          <a:lstStyle/>
+          <a:p>
+            <a:pPr algn="ctr"/>
+          </a:p>
+        </p:txBody>
+      </p:sp>
+      <p:sp>
+        <p:nvSpPr>
+          <p:cNvPr id="6" name="TextBox 5"/>
+          <p:cNvSpPr txBox="1"/>
+          <p:nvPr/>
+        </p:nvSpPr>
+        <p:spPr>
+          <a:xfrm>
+            <a:off x="658368" y="3032760"/>
+            <a:ext cx="10984687" cy="1569720"/>
+          </a:xfrm>
+          <a:prstGeom prst="rect">
+            <a:avLst/>
+          </a:prstGeom>
+          <a:noFill/>
+        </p:spPr>
+        <p:txBody>
+          <a:bodyPr wrap="square">
+            <a:spAutoFit/>
+          </a:bodyPr>
+          <a:lstStyle/>
+          <a:p>
+            <a:pPr>
+              <a:spcAft>
+                <a:spcPts val="300"/>
+              </a:spcAft>
+            </a:pPr>
+            <a:r>
+              <a:rPr sz="2100" b="1" i="0">
+                <a:solidFill>
+                  <a:srgbClr val="1A1A1A"/>
+                </a:solidFill>
+                <a:latin typeface="Arial"/>
+              </a:rPr>
+              <a:t>They learned what survives technology change — and what cost them dearly</a:t>
+            </a:r>
+          </a:p>
+        </p:txBody>
+      </p:sp>
+      <p:sp>
+        <p:nvSpPr>
+          <p:cNvPr id="7" name="Rectangle 6"/>
+          <p:cNvSpPr/>
+          <p:nvPr/>
+        </p:nvSpPr>
+        <p:spPr>
+          <a:xfrm>
+            <a:off x="621792" y="4607052"/>
+            <a:ext cx="10881360" cy="12700"/>
+          </a:xfrm>
+          <a:prstGeom prst="rect">
+            <a:avLst/>
+          </a:prstGeom>
+          <a:solidFill>
+            <a:srgbClr val="DDECF4"/>
+          </a:solidFill>
+          <a:ln>
+            <a:noFill/>
+          </a:ln>
+          <a:effectLst/>
+        </p:spPr>
+        <p:style>
+          <a:lnRef idx="1">
+            <a:schemeClr val="accent1"/>
+          </a:lnRef>
+          <a:fillRef idx="3">
+            <a:schemeClr val="accent1"/>
+          </a:fillRef>
+          <a:effectRef idx="2">
+            <a:schemeClr val="accent1"/>
+          </a:effectRef>
+          <a:fontRef idx="minor">
+            <a:schemeClr val="lt1"/>
+          </a:fontRef>
+        </p:style>
+        <p:txBody>
+          <a:bodyPr rtlCol="0" anchor="ctr"/>
+          <a:lstStyle/>
+          <a:p>
+            <a:pPr algn="ctr"/>
+          </a:p>
+        </p:txBody>
+      </p:sp>
+      <p:sp>
+        <p:nvSpPr>
+          <p:cNvPr id="8" name="TextBox 7"/>
+          <p:cNvSpPr txBox="1"/>
+          <p:nvPr/>
+        </p:nvSpPr>
+        <p:spPr>
+          <a:xfrm>
+            <a:off x="658368" y="4648200"/>
+            <a:ext cx="10984687" cy="1569720"/>
+          </a:xfrm>
+          <a:prstGeom prst="rect">
+            <a:avLst/>
+          </a:prstGeom>
+          <a:noFill/>
+        </p:spPr>
+        <p:txBody>
+          <a:bodyPr wrap="square">
+            <a:spAutoFit/>
+          </a:bodyPr>
+          <a:lstStyle/>
+          <a:p>
+            <a:pPr>
+              <a:spcAft>
+                <a:spcPts val="300"/>
+              </a:spcAft>
+            </a:pPr>
+            <a:r>
+              <a:rPr sz="2100" b="1" i="0">
+                <a:solidFill>
+                  <a:srgbClr val="1A1A1A"/>
+                </a:solidFill>
+                <a:latin typeface="Arial"/>
+              </a:rPr>
+              <a:t>A reference architecture is that learning, written down. PAERA is one such reference.</a:t>
+            </a:r>
+          </a:p>
+          <a:p>
+            <a:pPr>
+              <a:spcAft>
+                <a:spcPts val="300"/>
+              </a:spcAft>
+            </a:pPr>
+            <a:r>
+              <a:rPr sz="1600" b="0" i="0">
+                <a:solidFill>
+                  <a:srgbClr val="595959"/>
+                </a:solidFill>
+                <a:latin typeface="Arial"/>
+              </a:rPr>
+              <a:t>Adopting it means starting with their lessons, instead of paying for the same lessons yourself over the next twenty years.</a:t>
+            </a:r>
+          </a:p>
+        </p:txBody>
+      </p:sp>
+      <p:sp>
+        <p:nvSpPr>
+          <p:cNvPr id="9" name="TextBox 8"/>
+          <p:cNvSpPr txBox="1"/>
+          <p:nvPr/>
+        </p:nvSpPr>
+        <p:spPr>
+          <a:xfrm>
+            <a:off x="457200" y="6473952"/>
+            <a:ext cx="7772400" cy="292608"/>
+          </a:xfrm>
+          <a:prstGeom prst="rect">
+            <a:avLst/>
+          </a:prstGeom>
+          <a:noFill/>
+        </p:spPr>
+        <p:txBody>
+          <a:bodyPr wrap="square">
+            <a:spAutoFit/>
+          </a:bodyPr>
+          <a:lstStyle/>
+          <a:p>
+            <a:r>
+              <a:rPr sz="900" b="0" i="0">
+                <a:solidFill>
+                  <a:srgbClr val="595959"/>
+                </a:solidFill>
+                <a:latin typeface="Arial"/>
+              </a:rPr>
+              <a:t>1.3 · Why projects can't do this themselves</a:t>
+            </a:r>
+          </a:p>
+        </p:txBody>
+      </p:sp>
+    </p:spTree>
+  </p:cSld>
+  <p:clrMapOvr>
+    <a:masterClrMapping/>
+  </p:clrMapOvr>
+</p:sld>
+</file>
+
+<file path=ppt/slides/slide23.xml><?xml version="1.0" encoding="utf-8"?>
+<p:sld xmlns:a="http://schemas.openxmlformats.org/drawingml/2006/main" xmlns:p="http://schemas.openxmlformats.org/presentationml/2006/main" xmlns:r="http://schemas.openxmlformats.org/officeDocument/2006/relationships">
+  <p:cSld>
+    <p:spTree>
+      <p:nvGrpSpPr>
+        <p:cNvPr id="1" name=""/>
+        <p:cNvGrpSpPr/>
+        <p:nvPr/>
+      </p:nvGrpSpPr>
+      <p:grpSpPr/>
+      <p:sp>
+        <p:nvSpPr>
           <p:cNvPr id="2" name="TextBox 1"/>
           <p:cNvSpPr txBox="1"/>
           <p:nvPr/>
@@ -14661,7 +13999,7 @@
 </p:sld>
 </file>
 
-<file path=ppt/slides/slide21.xml><?xml version="1.0" encoding="utf-8"?>
+<file path=ppt/slides/slide24.xml><?xml version="1.0" encoding="utf-8"?>
 <p:sld xmlns:a="http://schemas.openxmlformats.org/drawingml/2006/main" xmlns:p="http://schemas.openxmlformats.org/presentationml/2006/main" xmlns:r="http://schemas.openxmlformats.org/officeDocument/2006/relationships">
   <p:cSld>
     <p:spTree>

--- a/10-Knowledge-Products/KP1-GEA/videos/module_1/en/decks/KP1_M1_1.3_Deck_v0.2.pptx
+++ b/10-Knowledge-Products/KP1-GEA/videos/module_1/en/decks/KP1_M1_1.3_Deck_v0.2.pptx
@@ -11647,7 +11647,7 @@
                 </a:solidFill>
                 <a:latin typeface="Arial"/>
               </a:rPr>
-              <a:t>KP1 · MODULE 1 · VIDEO 1.3</a:t>
+              <a:t>MODULE 1 · VIDEO 1.3</a:t>
             </a:r>
           </a:p>
         </p:txBody>
